--- a/projects/spanisch/kl07/sequenz-06-ciudad/06b-ir-estar/PPT-06b.pptx
+++ b/projects/spanisch/kl07/sequenz-06-ciudad/06b-ir-estar/PPT-06b.pptx
@@ -10,6 +10,15 @@
     <p:sldId id="258" r:id="rId9"/>
     <p:sldId id="259" r:id="rId10"/>
     <p:sldId id="260" r:id="rId11"/>
+    <p:sldId id="261" r:id="rId12"/>
+    <p:sldId id="262" r:id="rId13"/>
+    <p:sldId id="263" r:id="rId14"/>
+    <p:sldId id="264" r:id="rId15"/>
+    <p:sldId id="265" r:id="rId16"/>
+    <p:sldId id="266" r:id="rId17"/>
+    <p:sldId id="267" r:id="rId18"/>
+    <p:sldId id="268" r:id="rId19"/>
+    <p:sldId id="269" r:id="rId20"/>
   </p:sldIdLst>
   <p:sldSz cx="12191695" cy="6858000" type="screen4x3"/>
   <p:notesSz cx="6858000" cy="9144000"/>
@@ -3323,6 +3332,2696 @@
 </p:sld>
 </file>
 
+<file path=ppt/slides/slide10.xml><?xml version="1.0" encoding="utf-8"?>
+<p:sld xmlns:a="http://schemas.openxmlformats.org/drawingml/2006/main" xmlns:p="http://schemas.openxmlformats.org/presentationml/2006/main" xmlns:r="http://schemas.openxmlformats.org/officeDocument/2006/relationships">
+  <p:cSld>
+    <p:spTree>
+      <p:nvGrpSpPr>
+        <p:cNvPr id="1" name=""/>
+        <p:cNvGrpSpPr/>
+        <p:nvPr/>
+      </p:nvGrpSpPr>
+      <p:grpSpPr/>
+      <p:sp>
+        <p:nvSpPr>
+          <p:cNvPr id="2" name="Rectangle 1"/>
+          <p:cNvSpPr/>
+          <p:nvPr/>
+        </p:nvSpPr>
+        <p:spPr>
+          <a:xfrm>
+            <a:off x="0" y="0"/>
+            <a:ext cx="12191695" cy="457200"/>
+          </a:xfrm>
+          <a:prstGeom prst="rect">
+            <a:avLst/>
+          </a:prstGeom>
+          <a:solidFill>
+            <a:srgbClr val="C41E3A"/>
+          </a:solidFill>
+          <a:ln>
+            <a:noFill/>
+          </a:ln>
+        </p:spPr>
+        <p:style>
+          <a:lnRef idx="1">
+            <a:schemeClr val="accent1"/>
+          </a:lnRef>
+          <a:fillRef idx="3">
+            <a:schemeClr val="accent1"/>
+          </a:fillRef>
+          <a:effectRef idx="2">
+            <a:schemeClr val="accent1"/>
+          </a:effectRef>
+          <a:fontRef idx="minor">
+            <a:schemeClr val="lt1"/>
+          </a:fontRef>
+        </p:style>
+        <p:txBody>
+          <a:bodyPr rtlCol="0" anchor="ctr"/>
+          <a:lstStyle/>
+          <a:p>
+            <a:pPr algn="ctr"/>
+          </a:p>
+        </p:txBody>
+      </p:sp>
+      <p:sp>
+        <p:nvSpPr>
+          <p:cNvPr id="3" name="TextBox 2"/>
+          <p:cNvSpPr txBox="1"/>
+          <p:nvPr/>
+        </p:nvSpPr>
+        <p:spPr>
+          <a:xfrm>
+            <a:off x="274320" y="91440"/>
+            <a:ext cx="3657600" cy="274320"/>
+          </a:xfrm>
+          <a:prstGeom prst="rect">
+            <a:avLst/>
+          </a:prstGeom>
+          <a:noFill/>
+        </p:spPr>
+        <p:txBody>
+          <a:bodyPr wrap="none">
+            <a:spAutoFit/>
+          </a:bodyPr>
+          <a:lstStyle/>
+          <a:p>
+            <a:pPr algn="l">
+              <a:defRPr sz="1400" b="1">
+                <a:solidFill>
+                  <a:srgbClr val="FFFFFF"/>
+                </a:solidFill>
+                <a:latin typeface="Arial"/>
+              </a:defRPr>
+            </a:pPr>
+            <a:r>
+              <a:t>Spanisch Klasse 7 · LP-06b</a:t>
+            </a:r>
+          </a:p>
+        </p:txBody>
+      </p:sp>
+      <p:sp>
+        <p:nvSpPr>
+          <p:cNvPr id="4" name="Rectangle 3"/>
+          <p:cNvSpPr/>
+          <p:nvPr/>
+        </p:nvSpPr>
+        <p:spPr>
+          <a:xfrm>
+            <a:off x="0" y="6583680"/>
+            <a:ext cx="12191695" cy="274320"/>
+          </a:xfrm>
+          <a:prstGeom prst="rect">
+            <a:avLst/>
+          </a:prstGeom>
+          <a:solidFill>
+            <a:srgbClr val="F5F5F5"/>
+          </a:solidFill>
+          <a:ln>
+            <a:noFill/>
+          </a:ln>
+        </p:spPr>
+        <p:style>
+          <a:lnRef idx="1">
+            <a:schemeClr val="accent1"/>
+          </a:lnRef>
+          <a:fillRef idx="3">
+            <a:schemeClr val="accent1"/>
+          </a:fillRef>
+          <a:effectRef idx="2">
+            <a:schemeClr val="accent1"/>
+          </a:effectRef>
+          <a:fontRef idx="minor">
+            <a:schemeClr val="lt1"/>
+          </a:fontRef>
+        </p:style>
+        <p:txBody>
+          <a:bodyPr rtlCol="0" anchor="ctr"/>
+          <a:lstStyle/>
+          <a:p>
+            <a:pPr algn="ctr"/>
+          </a:p>
+        </p:txBody>
+      </p:sp>
+      <p:sp>
+        <p:nvSpPr>
+          <p:cNvPr id="5" name="TextBox 4"/>
+          <p:cNvSpPr txBox="1"/>
+          <p:nvPr/>
+        </p:nvSpPr>
+        <p:spPr>
+          <a:xfrm>
+            <a:off x="274320" y="6601968"/>
+            <a:ext cx="4572000" cy="228600"/>
+          </a:xfrm>
+          <a:prstGeom prst="rect">
+            <a:avLst/>
+          </a:prstGeom>
+          <a:noFill/>
+        </p:spPr>
+        <p:txBody>
+          <a:bodyPr wrap="none">
+            <a:spAutoFit/>
+          </a:bodyPr>
+          <a:lstStyle/>
+          <a:p>
+            <a:pPr algn="l">
+              <a:defRPr sz="1000" b="0">
+                <a:solidFill>
+                  <a:srgbClr val="555555"/>
+                </a:solidFill>
+                <a:latin typeface="Arial"/>
+              </a:defRPr>
+            </a:pPr>
+            <a:r>
+              <a:t>Ir y estar</a:t>
+            </a:r>
+          </a:p>
+        </p:txBody>
+      </p:sp>
+      <p:sp>
+        <p:nvSpPr>
+          <p:cNvPr id="6" name="TextBox 5"/>
+          <p:cNvSpPr txBox="1"/>
+          <p:nvPr/>
+        </p:nvSpPr>
+        <p:spPr>
+          <a:xfrm>
+            <a:off x="9144000" y="6601968"/>
+            <a:ext cx="2743200" cy="228600"/>
+          </a:xfrm>
+          <a:prstGeom prst="rect">
+            <a:avLst/>
+          </a:prstGeom>
+          <a:noFill/>
+        </p:spPr>
+        <p:txBody>
+          <a:bodyPr wrap="none">
+            <a:spAutoFit/>
+          </a:bodyPr>
+          <a:lstStyle/>
+          <a:p>
+            <a:pPr algn="r">
+              <a:defRPr sz="1000" b="0">
+                <a:solidFill>
+                  <a:srgbClr val="555555"/>
+                </a:solidFill>
+                <a:latin typeface="Arial"/>
+              </a:defRPr>
+            </a:pPr>
+            <a:r>
+              <a:t>Sequenz 6</a:t>
+            </a:r>
+          </a:p>
+        </p:txBody>
+      </p:sp>
+      <p:sp>
+        <p:nvSpPr>
+          <p:cNvPr id="7" name="Rectangle 6"/>
+          <p:cNvSpPr/>
+          <p:nvPr/>
+        </p:nvSpPr>
+        <p:spPr>
+          <a:xfrm>
+            <a:off x="457200" y="640080"/>
+            <a:ext cx="1828800" cy="457200"/>
+          </a:xfrm>
+          <a:prstGeom prst="rect">
+            <a:avLst/>
+          </a:prstGeom>
+          <a:solidFill>
+            <a:srgbClr val="C41E3A"/>
+          </a:solidFill>
+          <a:ln>
+            <a:noFill/>
+          </a:ln>
+        </p:spPr>
+        <p:style>
+          <a:lnRef idx="1">
+            <a:schemeClr val="accent1"/>
+          </a:lnRef>
+          <a:fillRef idx="3">
+            <a:schemeClr val="accent1"/>
+          </a:fillRef>
+          <a:effectRef idx="2">
+            <a:schemeClr val="accent1"/>
+          </a:effectRef>
+          <a:fontRef idx="minor">
+            <a:schemeClr val="lt1"/>
+          </a:fontRef>
+        </p:style>
+        <p:txBody>
+          <a:bodyPr rtlCol="0" anchor="ctr"/>
+          <a:lstStyle/>
+          <a:p>
+            <a:pPr algn="ctr"/>
+          </a:p>
+        </p:txBody>
+      </p:sp>
+      <p:sp>
+        <p:nvSpPr>
+          <p:cNvPr id="8" name="TextBox 7"/>
+          <p:cNvSpPr txBox="1"/>
+          <p:nvPr/>
+        </p:nvSpPr>
+        <p:spPr>
+          <a:xfrm>
+            <a:off x="548640" y="713231"/>
+            <a:ext cx="1645920" cy="320040"/>
+          </a:xfrm>
+          <a:prstGeom prst="rect">
+            <a:avLst/>
+          </a:prstGeom>
+          <a:noFill/>
+        </p:spPr>
+        <p:txBody>
+          <a:bodyPr wrap="none">
+            <a:spAutoFit/>
+          </a:bodyPr>
+          <a:lstStyle/>
+          <a:p>
+            <a:pPr algn="ctr">
+              <a:defRPr sz="1400" b="1">
+                <a:solidFill>
+                  <a:srgbClr val="FFFFFF"/>
+                </a:solidFill>
+                <a:latin typeface="Arial"/>
+              </a:defRPr>
+            </a:pPr>
+            <a:r>
+              <a:t>ÜBUNG</a:t>
+            </a:r>
+          </a:p>
+        </p:txBody>
+      </p:sp>
+      <p:sp>
+        <p:nvSpPr>
+          <p:cNvPr id="9" name="TextBox 8"/>
+          <p:cNvSpPr txBox="1"/>
+          <p:nvPr/>
+        </p:nvSpPr>
+        <p:spPr>
+          <a:xfrm>
+            <a:off x="457200" y="1280160"/>
+            <a:ext cx="11274552" cy="731520"/>
+          </a:xfrm>
+          <a:prstGeom prst="rect">
+            <a:avLst/>
+          </a:prstGeom>
+          <a:noFill/>
+        </p:spPr>
+        <p:txBody>
+          <a:bodyPr wrap="none">
+            <a:spAutoFit/>
+          </a:bodyPr>
+          <a:lstStyle/>
+          <a:p>
+            <a:pPr algn="l">
+              <a:defRPr sz="3200" b="1">
+                <a:solidFill>
+                  <a:srgbClr val="C41E3A"/>
+                </a:solidFill>
+                <a:latin typeface="Arial"/>
+              </a:defRPr>
+            </a:pPr>
+            <a:r>
+              <a:t>✏️ Übung: ir oder estar?</a:t>
+            </a:r>
+          </a:p>
+        </p:txBody>
+      </p:sp>
+      <p:sp>
+        <p:nvSpPr>
+          <p:cNvPr id="10" name="TextBox 9"/>
+          <p:cNvSpPr txBox="1"/>
+          <p:nvPr/>
+        </p:nvSpPr>
+        <p:spPr>
+          <a:xfrm>
+            <a:off x="640080" y="2011680"/>
+            <a:ext cx="5029200" cy="548640"/>
+          </a:xfrm>
+          <a:prstGeom prst="rect">
+            <a:avLst/>
+          </a:prstGeom>
+          <a:noFill/>
+        </p:spPr>
+        <p:txBody>
+          <a:bodyPr wrap="none">
+            <a:spAutoFit/>
+          </a:bodyPr>
+          <a:lstStyle/>
+          <a:p>
+            <a:pPr algn="l">
+              <a:defRPr sz="2200" b="1">
+                <a:solidFill>
+                  <a:srgbClr val="C41E3A"/>
+                </a:solidFill>
+                <a:latin typeface="Arial"/>
+              </a:defRPr>
+            </a:pPr>
+            <a:r>
+              <a:t>___ al supermercado. (ich gehe)</a:t>
+            </a:r>
+          </a:p>
+        </p:txBody>
+      </p:sp>
+      <p:sp>
+        <p:nvSpPr>
+          <p:cNvPr id="11" name="TextBox 10"/>
+          <p:cNvSpPr txBox="1"/>
+          <p:nvPr/>
+        </p:nvSpPr>
+        <p:spPr>
+          <a:xfrm>
+            <a:off x="5943600" y="2011680"/>
+            <a:ext cx="5029200" cy="548640"/>
+          </a:xfrm>
+          <a:prstGeom prst="rect">
+            <a:avLst/>
+          </a:prstGeom>
+          <a:noFill/>
+        </p:spPr>
+        <p:txBody>
+          <a:bodyPr wrap="none">
+            <a:spAutoFit/>
+          </a:bodyPr>
+          <a:lstStyle/>
+          <a:p>
+            <a:pPr algn="l">
+              <a:defRPr sz="2200" b="0">
+                <a:solidFill>
+                  <a:srgbClr val="888888"/>
+                </a:solidFill>
+                <a:latin typeface="Arial"/>
+              </a:defRPr>
+            </a:pPr>
+            <a:r>
+              <a:t>___</a:t>
+            </a:r>
+          </a:p>
+        </p:txBody>
+      </p:sp>
+      <p:sp>
+        <p:nvSpPr>
+          <p:cNvPr id="12" name="TextBox 11"/>
+          <p:cNvSpPr txBox="1"/>
+          <p:nvPr/>
+        </p:nvSpPr>
+        <p:spPr>
+          <a:xfrm>
+            <a:off x="640080" y="2926080"/>
+            <a:ext cx="5029200" cy="548640"/>
+          </a:xfrm>
+          <a:prstGeom prst="rect">
+            <a:avLst/>
+          </a:prstGeom>
+          <a:noFill/>
+        </p:spPr>
+        <p:txBody>
+          <a:bodyPr wrap="none">
+            <a:spAutoFit/>
+          </a:bodyPr>
+          <a:lstStyle/>
+          <a:p>
+            <a:pPr algn="l">
+              <a:defRPr sz="2200" b="1">
+                <a:solidFill>
+                  <a:srgbClr val="C41E3A"/>
+                </a:solidFill>
+                <a:latin typeface="Arial"/>
+              </a:defRPr>
+            </a:pPr>
+            <a:r>
+              <a:t>___ en casa. (ich bin)</a:t>
+            </a:r>
+          </a:p>
+        </p:txBody>
+      </p:sp>
+      <p:sp>
+        <p:nvSpPr>
+          <p:cNvPr id="13" name="TextBox 12"/>
+          <p:cNvSpPr txBox="1"/>
+          <p:nvPr/>
+        </p:nvSpPr>
+        <p:spPr>
+          <a:xfrm>
+            <a:off x="5943600" y="2926080"/>
+            <a:ext cx="5029200" cy="548640"/>
+          </a:xfrm>
+          <a:prstGeom prst="rect">
+            <a:avLst/>
+          </a:prstGeom>
+          <a:noFill/>
+        </p:spPr>
+        <p:txBody>
+          <a:bodyPr wrap="none">
+            <a:spAutoFit/>
+          </a:bodyPr>
+          <a:lstStyle/>
+          <a:p>
+            <a:pPr algn="l">
+              <a:defRPr sz="2200" b="0">
+                <a:solidFill>
+                  <a:srgbClr val="888888"/>
+                </a:solidFill>
+                <a:latin typeface="Arial"/>
+              </a:defRPr>
+            </a:pPr>
+            <a:r>
+              <a:t>___</a:t>
+            </a:r>
+          </a:p>
+        </p:txBody>
+      </p:sp>
+      <p:sp>
+        <p:nvSpPr>
+          <p:cNvPr id="14" name="Rectangle 13"/>
+          <p:cNvSpPr/>
+          <p:nvPr/>
+        </p:nvSpPr>
+        <p:spPr>
+          <a:xfrm>
+            <a:off x="457200" y="5943600"/>
+            <a:ext cx="11274552" cy="548640"/>
+          </a:xfrm>
+          <a:prstGeom prst="rect">
+            <a:avLst/>
+          </a:prstGeom>
+          <a:solidFill>
+            <a:srgbClr val="FDF2F4"/>
+          </a:solidFill>
+          <a:ln>
+            <a:solidFill>
+              <a:srgbClr val="C41E3A"/>
+            </a:solidFill>
+          </a:ln>
+        </p:spPr>
+        <p:style>
+          <a:lnRef idx="1">
+            <a:schemeClr val="accent1"/>
+          </a:lnRef>
+          <a:fillRef idx="3">
+            <a:schemeClr val="accent1"/>
+          </a:fillRef>
+          <a:effectRef idx="2">
+            <a:schemeClr val="accent1"/>
+          </a:effectRef>
+          <a:fontRef idx="minor">
+            <a:schemeClr val="lt1"/>
+          </a:fontRef>
+        </p:style>
+        <p:txBody>
+          <a:bodyPr rtlCol="0" anchor="ctr"/>
+          <a:lstStyle/>
+          <a:p>
+            <a:pPr algn="ctr"/>
+          </a:p>
+        </p:txBody>
+      </p:sp>
+      <p:sp>
+        <p:nvSpPr>
+          <p:cNvPr id="15" name="TextBox 14"/>
+          <p:cNvSpPr txBox="1"/>
+          <p:nvPr/>
+        </p:nvSpPr>
+        <p:spPr>
+          <a:xfrm>
+            <a:off x="640080" y="6053328"/>
+            <a:ext cx="10972800" cy="365760"/>
+          </a:xfrm>
+          <a:prstGeom prst="rect">
+            <a:avLst/>
+          </a:prstGeom>
+          <a:noFill/>
+        </p:spPr>
+        <p:txBody>
+          <a:bodyPr wrap="none">
+            <a:spAutoFit/>
+          </a:bodyPr>
+          <a:lstStyle/>
+          <a:p>
+            <a:pPr algn="l">
+              <a:defRPr sz="1400" b="1">
+                <a:solidFill>
+                  <a:srgbClr val="C41E3A"/>
+                </a:solidFill>
+                <a:latin typeface="Arial"/>
+              </a:defRPr>
+            </a:pPr>
+            <a:r>
+              <a:t>📝 AB-06b: Aufgabe 2</a:t>
+            </a:r>
+          </a:p>
+        </p:txBody>
+      </p:sp>
+    </p:spTree>
+  </p:cSld>
+  <p:clrMapOvr>
+    <a:masterClrMapping/>
+  </p:clrMapOvr>
+</p:sld>
+</file>
+
+<file path=ppt/slides/slide11.xml><?xml version="1.0" encoding="utf-8"?>
+<p:sld xmlns:a="http://schemas.openxmlformats.org/drawingml/2006/main" xmlns:p="http://schemas.openxmlformats.org/presentationml/2006/main" xmlns:r="http://schemas.openxmlformats.org/officeDocument/2006/relationships">
+  <p:cSld>
+    <p:spTree>
+      <p:nvGrpSpPr>
+        <p:cNvPr id="1" name=""/>
+        <p:cNvGrpSpPr/>
+        <p:nvPr/>
+      </p:nvGrpSpPr>
+      <p:grpSpPr/>
+      <p:sp>
+        <p:nvSpPr>
+          <p:cNvPr id="2" name="Rectangle 1"/>
+          <p:cNvSpPr/>
+          <p:nvPr/>
+        </p:nvSpPr>
+        <p:spPr>
+          <a:xfrm>
+            <a:off x="0" y="0"/>
+            <a:ext cx="12191695" cy="457200"/>
+          </a:xfrm>
+          <a:prstGeom prst="rect">
+            <a:avLst/>
+          </a:prstGeom>
+          <a:solidFill>
+            <a:srgbClr val="C41E3A"/>
+          </a:solidFill>
+          <a:ln>
+            <a:noFill/>
+          </a:ln>
+        </p:spPr>
+        <p:style>
+          <a:lnRef idx="1">
+            <a:schemeClr val="accent1"/>
+          </a:lnRef>
+          <a:fillRef idx="3">
+            <a:schemeClr val="accent1"/>
+          </a:fillRef>
+          <a:effectRef idx="2">
+            <a:schemeClr val="accent1"/>
+          </a:effectRef>
+          <a:fontRef idx="minor">
+            <a:schemeClr val="lt1"/>
+          </a:fontRef>
+        </p:style>
+        <p:txBody>
+          <a:bodyPr rtlCol="0" anchor="ctr"/>
+          <a:lstStyle/>
+          <a:p>
+            <a:pPr algn="ctr"/>
+          </a:p>
+        </p:txBody>
+      </p:sp>
+      <p:sp>
+        <p:nvSpPr>
+          <p:cNvPr id="3" name="TextBox 2"/>
+          <p:cNvSpPr txBox="1"/>
+          <p:nvPr/>
+        </p:nvSpPr>
+        <p:spPr>
+          <a:xfrm>
+            <a:off x="274320" y="91440"/>
+            <a:ext cx="3657600" cy="274320"/>
+          </a:xfrm>
+          <a:prstGeom prst="rect">
+            <a:avLst/>
+          </a:prstGeom>
+          <a:noFill/>
+        </p:spPr>
+        <p:txBody>
+          <a:bodyPr wrap="none">
+            <a:spAutoFit/>
+          </a:bodyPr>
+          <a:lstStyle/>
+          <a:p>
+            <a:pPr algn="l">
+              <a:defRPr sz="1400" b="1">
+                <a:solidFill>
+                  <a:srgbClr val="FFFFFF"/>
+                </a:solidFill>
+                <a:latin typeface="Arial"/>
+              </a:defRPr>
+            </a:pPr>
+            <a:r>
+              <a:t>Spanisch Klasse 7 · LP-06b</a:t>
+            </a:r>
+          </a:p>
+        </p:txBody>
+      </p:sp>
+      <p:sp>
+        <p:nvSpPr>
+          <p:cNvPr id="4" name="Rectangle 3"/>
+          <p:cNvSpPr/>
+          <p:nvPr/>
+        </p:nvSpPr>
+        <p:spPr>
+          <a:xfrm>
+            <a:off x="0" y="6583680"/>
+            <a:ext cx="12191695" cy="274320"/>
+          </a:xfrm>
+          <a:prstGeom prst="rect">
+            <a:avLst/>
+          </a:prstGeom>
+          <a:solidFill>
+            <a:srgbClr val="F5F5F5"/>
+          </a:solidFill>
+          <a:ln>
+            <a:noFill/>
+          </a:ln>
+        </p:spPr>
+        <p:style>
+          <a:lnRef idx="1">
+            <a:schemeClr val="accent1"/>
+          </a:lnRef>
+          <a:fillRef idx="3">
+            <a:schemeClr val="accent1"/>
+          </a:fillRef>
+          <a:effectRef idx="2">
+            <a:schemeClr val="accent1"/>
+          </a:effectRef>
+          <a:fontRef idx="minor">
+            <a:schemeClr val="lt1"/>
+          </a:fontRef>
+        </p:style>
+        <p:txBody>
+          <a:bodyPr rtlCol="0" anchor="ctr"/>
+          <a:lstStyle/>
+          <a:p>
+            <a:pPr algn="ctr"/>
+          </a:p>
+        </p:txBody>
+      </p:sp>
+      <p:sp>
+        <p:nvSpPr>
+          <p:cNvPr id="5" name="TextBox 4"/>
+          <p:cNvSpPr txBox="1"/>
+          <p:nvPr/>
+        </p:nvSpPr>
+        <p:spPr>
+          <a:xfrm>
+            <a:off x="274320" y="6601968"/>
+            <a:ext cx="4572000" cy="228600"/>
+          </a:xfrm>
+          <a:prstGeom prst="rect">
+            <a:avLst/>
+          </a:prstGeom>
+          <a:noFill/>
+        </p:spPr>
+        <p:txBody>
+          <a:bodyPr wrap="none">
+            <a:spAutoFit/>
+          </a:bodyPr>
+          <a:lstStyle/>
+          <a:p>
+            <a:pPr algn="l">
+              <a:defRPr sz="1000" b="0">
+                <a:solidFill>
+                  <a:srgbClr val="555555"/>
+                </a:solidFill>
+                <a:latin typeface="Arial"/>
+              </a:defRPr>
+            </a:pPr>
+            <a:r>
+              <a:t>Ir y estar</a:t>
+            </a:r>
+          </a:p>
+        </p:txBody>
+      </p:sp>
+      <p:sp>
+        <p:nvSpPr>
+          <p:cNvPr id="6" name="TextBox 5"/>
+          <p:cNvSpPr txBox="1"/>
+          <p:nvPr/>
+        </p:nvSpPr>
+        <p:spPr>
+          <a:xfrm>
+            <a:off x="9144000" y="6601968"/>
+            <a:ext cx="2743200" cy="228600"/>
+          </a:xfrm>
+          <a:prstGeom prst="rect">
+            <a:avLst/>
+          </a:prstGeom>
+          <a:noFill/>
+        </p:spPr>
+        <p:txBody>
+          <a:bodyPr wrap="none">
+            <a:spAutoFit/>
+          </a:bodyPr>
+          <a:lstStyle/>
+          <a:p>
+            <a:pPr algn="r">
+              <a:defRPr sz="1000" b="0">
+                <a:solidFill>
+                  <a:srgbClr val="555555"/>
+                </a:solidFill>
+                <a:latin typeface="Arial"/>
+              </a:defRPr>
+            </a:pPr>
+            <a:r>
+              <a:t>Sequenz 6</a:t>
+            </a:r>
+          </a:p>
+        </p:txBody>
+      </p:sp>
+      <p:sp>
+        <p:nvSpPr>
+          <p:cNvPr id="7" name="Rectangle 6"/>
+          <p:cNvSpPr/>
+          <p:nvPr/>
+        </p:nvSpPr>
+        <p:spPr>
+          <a:xfrm>
+            <a:off x="457200" y="640080"/>
+            <a:ext cx="1828800" cy="457200"/>
+          </a:xfrm>
+          <a:prstGeom prst="rect">
+            <a:avLst/>
+          </a:prstGeom>
+          <a:solidFill>
+            <a:srgbClr val="2A7A4B"/>
+          </a:solidFill>
+          <a:ln>
+            <a:noFill/>
+          </a:ln>
+        </p:spPr>
+        <p:style>
+          <a:lnRef idx="1">
+            <a:schemeClr val="accent1"/>
+          </a:lnRef>
+          <a:fillRef idx="3">
+            <a:schemeClr val="accent1"/>
+          </a:fillRef>
+          <a:effectRef idx="2">
+            <a:schemeClr val="accent1"/>
+          </a:effectRef>
+          <a:fontRef idx="minor">
+            <a:schemeClr val="lt1"/>
+          </a:fontRef>
+        </p:style>
+        <p:txBody>
+          <a:bodyPr rtlCol="0" anchor="ctr"/>
+          <a:lstStyle/>
+          <a:p>
+            <a:pPr algn="ctr"/>
+          </a:p>
+        </p:txBody>
+      </p:sp>
+      <p:sp>
+        <p:nvSpPr>
+          <p:cNvPr id="8" name="TextBox 7"/>
+          <p:cNvSpPr txBox="1"/>
+          <p:nvPr/>
+        </p:nvSpPr>
+        <p:spPr>
+          <a:xfrm>
+            <a:off x="548640" y="713231"/>
+            <a:ext cx="1645920" cy="320040"/>
+          </a:xfrm>
+          <a:prstGeom prst="rect">
+            <a:avLst/>
+          </a:prstGeom>
+          <a:noFill/>
+        </p:spPr>
+        <p:txBody>
+          <a:bodyPr wrap="none">
+            <a:spAutoFit/>
+          </a:bodyPr>
+          <a:lstStyle/>
+          <a:p>
+            <a:pPr algn="ctr">
+              <a:defRPr sz="1400" b="1">
+                <a:solidFill>
+                  <a:srgbClr val="FFFFFF"/>
+                </a:solidFill>
+                <a:latin typeface="Arial"/>
+              </a:defRPr>
+            </a:pPr>
+            <a:r>
+              <a:t>LÖSUNG</a:t>
+            </a:r>
+          </a:p>
+        </p:txBody>
+      </p:sp>
+      <p:sp>
+        <p:nvSpPr>
+          <p:cNvPr id="9" name="TextBox 8"/>
+          <p:cNvSpPr txBox="1"/>
+          <p:nvPr/>
+        </p:nvSpPr>
+        <p:spPr>
+          <a:xfrm>
+            <a:off x="457200" y="1280160"/>
+            <a:ext cx="11274552" cy="731520"/>
+          </a:xfrm>
+          <a:prstGeom prst="rect">
+            <a:avLst/>
+          </a:prstGeom>
+          <a:noFill/>
+        </p:spPr>
+        <p:txBody>
+          <a:bodyPr wrap="none">
+            <a:spAutoFit/>
+          </a:bodyPr>
+          <a:lstStyle/>
+          <a:p>
+            <a:pPr algn="l">
+              <a:defRPr sz="3200" b="1">
+                <a:solidFill>
+                  <a:srgbClr val="C41E3A"/>
+                </a:solidFill>
+                <a:latin typeface="Arial"/>
+              </a:defRPr>
+            </a:pPr>
+            <a:r>
+              <a:t>✅ Lösung</a:t>
+            </a:r>
+          </a:p>
+        </p:txBody>
+      </p:sp>
+      <p:sp>
+        <p:nvSpPr>
+          <p:cNvPr id="10" name="TextBox 9"/>
+          <p:cNvSpPr txBox="1"/>
+          <p:nvPr/>
+        </p:nvSpPr>
+        <p:spPr>
+          <a:xfrm>
+            <a:off x="640080" y="2011680"/>
+            <a:ext cx="5029200" cy="548640"/>
+          </a:xfrm>
+          <a:prstGeom prst="rect">
+            <a:avLst/>
+          </a:prstGeom>
+          <a:noFill/>
+        </p:spPr>
+        <p:txBody>
+          <a:bodyPr wrap="none">
+            <a:spAutoFit/>
+          </a:bodyPr>
+          <a:lstStyle/>
+          <a:p>
+            <a:pPr algn="l">
+              <a:defRPr sz="2400" b="1">
+                <a:solidFill>
+                  <a:srgbClr val="C41E3A"/>
+                </a:solidFill>
+                <a:latin typeface="Arial"/>
+              </a:defRPr>
+            </a:pPr>
+            <a:r>
+              <a:t>Voy al supermercado.</a:t>
+            </a:r>
+          </a:p>
+        </p:txBody>
+      </p:sp>
+      <p:sp>
+        <p:nvSpPr>
+          <p:cNvPr id="11" name="TextBox 10"/>
+          <p:cNvSpPr txBox="1"/>
+          <p:nvPr/>
+        </p:nvSpPr>
+        <p:spPr>
+          <a:xfrm>
+            <a:off x="5943600" y="2011680"/>
+            <a:ext cx="5029200" cy="548640"/>
+          </a:xfrm>
+          <a:prstGeom prst="rect">
+            <a:avLst/>
+          </a:prstGeom>
+          <a:noFill/>
+        </p:spPr>
+        <p:txBody>
+          <a:bodyPr wrap="none">
+            <a:spAutoFit/>
+          </a:bodyPr>
+          <a:lstStyle/>
+          <a:p>
+            <a:pPr algn="l">
+              <a:defRPr sz="2400" b="1">
+                <a:solidFill>
+                  <a:srgbClr val="2A7A4B"/>
+                </a:solidFill>
+                <a:latin typeface="Arial"/>
+              </a:defRPr>
+            </a:pPr>
+            <a:r>
+              <a:t>✓</a:t>
+            </a:r>
+          </a:p>
+        </p:txBody>
+      </p:sp>
+      <p:sp>
+        <p:nvSpPr>
+          <p:cNvPr id="12" name="TextBox 11"/>
+          <p:cNvSpPr txBox="1"/>
+          <p:nvPr/>
+        </p:nvSpPr>
+        <p:spPr>
+          <a:xfrm>
+            <a:off x="640080" y="3108960"/>
+            <a:ext cx="5029200" cy="548640"/>
+          </a:xfrm>
+          <a:prstGeom prst="rect">
+            <a:avLst/>
+          </a:prstGeom>
+          <a:noFill/>
+        </p:spPr>
+        <p:txBody>
+          <a:bodyPr wrap="none">
+            <a:spAutoFit/>
+          </a:bodyPr>
+          <a:lstStyle/>
+          <a:p>
+            <a:pPr algn="l">
+              <a:defRPr sz="2400" b="1">
+                <a:solidFill>
+                  <a:srgbClr val="C41E3A"/>
+                </a:solidFill>
+                <a:latin typeface="Arial"/>
+              </a:defRPr>
+            </a:pPr>
+            <a:r>
+              <a:t>Estoy en casa.</a:t>
+            </a:r>
+          </a:p>
+        </p:txBody>
+      </p:sp>
+      <p:sp>
+        <p:nvSpPr>
+          <p:cNvPr id="13" name="TextBox 12"/>
+          <p:cNvSpPr txBox="1"/>
+          <p:nvPr/>
+        </p:nvSpPr>
+        <p:spPr>
+          <a:xfrm>
+            <a:off x="5943600" y="3108960"/>
+            <a:ext cx="5029200" cy="548640"/>
+          </a:xfrm>
+          <a:prstGeom prst="rect">
+            <a:avLst/>
+          </a:prstGeom>
+          <a:noFill/>
+        </p:spPr>
+        <p:txBody>
+          <a:bodyPr wrap="none">
+            <a:spAutoFit/>
+          </a:bodyPr>
+          <a:lstStyle/>
+          <a:p>
+            <a:pPr algn="l">
+              <a:defRPr sz="2400" b="1">
+                <a:solidFill>
+                  <a:srgbClr val="2A7A4B"/>
+                </a:solidFill>
+                <a:latin typeface="Arial"/>
+              </a:defRPr>
+            </a:pPr>
+            <a:r>
+              <a:t>✓</a:t>
+            </a:r>
+          </a:p>
+        </p:txBody>
+      </p:sp>
+    </p:spTree>
+  </p:cSld>
+  <p:clrMapOvr>
+    <a:masterClrMapping/>
+  </p:clrMapOvr>
+</p:sld>
+</file>
+
+<file path=ppt/slides/slide12.xml><?xml version="1.0" encoding="utf-8"?>
+<p:sld xmlns:a="http://schemas.openxmlformats.org/drawingml/2006/main" xmlns:p="http://schemas.openxmlformats.org/presentationml/2006/main" xmlns:r="http://schemas.openxmlformats.org/officeDocument/2006/relationships">
+  <p:cSld>
+    <p:spTree>
+      <p:nvGrpSpPr>
+        <p:cNvPr id="1" name=""/>
+        <p:cNvGrpSpPr/>
+        <p:nvPr/>
+      </p:nvGrpSpPr>
+      <p:grpSpPr/>
+      <p:sp>
+        <p:nvSpPr>
+          <p:cNvPr id="2" name="Rectangle 1"/>
+          <p:cNvSpPr/>
+          <p:nvPr/>
+        </p:nvSpPr>
+        <p:spPr>
+          <a:xfrm>
+            <a:off x="0" y="0"/>
+            <a:ext cx="12191695" cy="457200"/>
+          </a:xfrm>
+          <a:prstGeom prst="rect">
+            <a:avLst/>
+          </a:prstGeom>
+          <a:solidFill>
+            <a:srgbClr val="C41E3A"/>
+          </a:solidFill>
+          <a:ln>
+            <a:noFill/>
+          </a:ln>
+        </p:spPr>
+        <p:style>
+          <a:lnRef idx="1">
+            <a:schemeClr val="accent1"/>
+          </a:lnRef>
+          <a:fillRef idx="3">
+            <a:schemeClr val="accent1"/>
+          </a:fillRef>
+          <a:effectRef idx="2">
+            <a:schemeClr val="accent1"/>
+          </a:effectRef>
+          <a:fontRef idx="minor">
+            <a:schemeClr val="lt1"/>
+          </a:fontRef>
+        </p:style>
+        <p:txBody>
+          <a:bodyPr rtlCol="0" anchor="ctr"/>
+          <a:lstStyle/>
+          <a:p>
+            <a:pPr algn="ctr"/>
+          </a:p>
+        </p:txBody>
+      </p:sp>
+      <p:sp>
+        <p:nvSpPr>
+          <p:cNvPr id="3" name="TextBox 2"/>
+          <p:cNvSpPr txBox="1"/>
+          <p:nvPr/>
+        </p:nvSpPr>
+        <p:spPr>
+          <a:xfrm>
+            <a:off x="274320" y="91440"/>
+            <a:ext cx="3657600" cy="274320"/>
+          </a:xfrm>
+          <a:prstGeom prst="rect">
+            <a:avLst/>
+          </a:prstGeom>
+          <a:noFill/>
+        </p:spPr>
+        <p:txBody>
+          <a:bodyPr wrap="none">
+            <a:spAutoFit/>
+          </a:bodyPr>
+          <a:lstStyle/>
+          <a:p>
+            <a:pPr algn="l">
+              <a:defRPr sz="1400" b="1">
+                <a:solidFill>
+                  <a:srgbClr val="FFFFFF"/>
+                </a:solidFill>
+                <a:latin typeface="Arial"/>
+              </a:defRPr>
+            </a:pPr>
+            <a:r>
+              <a:t>Spanisch Klasse 7 · LP-06b</a:t>
+            </a:r>
+          </a:p>
+        </p:txBody>
+      </p:sp>
+      <p:sp>
+        <p:nvSpPr>
+          <p:cNvPr id="4" name="Rectangle 3"/>
+          <p:cNvSpPr/>
+          <p:nvPr/>
+        </p:nvSpPr>
+        <p:spPr>
+          <a:xfrm>
+            <a:off x="0" y="6583680"/>
+            <a:ext cx="12191695" cy="274320"/>
+          </a:xfrm>
+          <a:prstGeom prst="rect">
+            <a:avLst/>
+          </a:prstGeom>
+          <a:solidFill>
+            <a:srgbClr val="F5F5F5"/>
+          </a:solidFill>
+          <a:ln>
+            <a:noFill/>
+          </a:ln>
+        </p:spPr>
+        <p:style>
+          <a:lnRef idx="1">
+            <a:schemeClr val="accent1"/>
+          </a:lnRef>
+          <a:fillRef idx="3">
+            <a:schemeClr val="accent1"/>
+          </a:fillRef>
+          <a:effectRef idx="2">
+            <a:schemeClr val="accent1"/>
+          </a:effectRef>
+          <a:fontRef idx="minor">
+            <a:schemeClr val="lt1"/>
+          </a:fontRef>
+        </p:style>
+        <p:txBody>
+          <a:bodyPr rtlCol="0" anchor="ctr"/>
+          <a:lstStyle/>
+          <a:p>
+            <a:pPr algn="ctr"/>
+          </a:p>
+        </p:txBody>
+      </p:sp>
+      <p:sp>
+        <p:nvSpPr>
+          <p:cNvPr id="5" name="TextBox 4"/>
+          <p:cNvSpPr txBox="1"/>
+          <p:nvPr/>
+        </p:nvSpPr>
+        <p:spPr>
+          <a:xfrm>
+            <a:off x="274320" y="6601968"/>
+            <a:ext cx="4572000" cy="228600"/>
+          </a:xfrm>
+          <a:prstGeom prst="rect">
+            <a:avLst/>
+          </a:prstGeom>
+          <a:noFill/>
+        </p:spPr>
+        <p:txBody>
+          <a:bodyPr wrap="none">
+            <a:spAutoFit/>
+          </a:bodyPr>
+          <a:lstStyle/>
+          <a:p>
+            <a:pPr algn="l">
+              <a:defRPr sz="1000" b="0">
+                <a:solidFill>
+                  <a:srgbClr val="555555"/>
+                </a:solidFill>
+                <a:latin typeface="Arial"/>
+              </a:defRPr>
+            </a:pPr>
+            <a:r>
+              <a:t>Ir y estar</a:t>
+            </a:r>
+          </a:p>
+        </p:txBody>
+      </p:sp>
+      <p:sp>
+        <p:nvSpPr>
+          <p:cNvPr id="6" name="TextBox 5"/>
+          <p:cNvSpPr txBox="1"/>
+          <p:nvPr/>
+        </p:nvSpPr>
+        <p:spPr>
+          <a:xfrm>
+            <a:off x="9144000" y="6601968"/>
+            <a:ext cx="2743200" cy="228600"/>
+          </a:xfrm>
+          <a:prstGeom prst="rect">
+            <a:avLst/>
+          </a:prstGeom>
+          <a:noFill/>
+        </p:spPr>
+        <p:txBody>
+          <a:bodyPr wrap="none">
+            <a:spAutoFit/>
+          </a:bodyPr>
+          <a:lstStyle/>
+          <a:p>
+            <a:pPr algn="r">
+              <a:defRPr sz="1000" b="0">
+                <a:solidFill>
+                  <a:srgbClr val="555555"/>
+                </a:solidFill>
+                <a:latin typeface="Arial"/>
+              </a:defRPr>
+            </a:pPr>
+            <a:r>
+              <a:t>Sequenz 6</a:t>
+            </a:r>
+          </a:p>
+        </p:txBody>
+      </p:sp>
+      <p:sp>
+        <p:nvSpPr>
+          <p:cNvPr id="7" name="Rectangle 6"/>
+          <p:cNvSpPr/>
+          <p:nvPr/>
+        </p:nvSpPr>
+        <p:spPr>
+          <a:xfrm>
+            <a:off x="457200" y="640080"/>
+            <a:ext cx="1828800" cy="457200"/>
+          </a:xfrm>
+          <a:prstGeom prst="rect">
+            <a:avLst/>
+          </a:prstGeom>
+          <a:solidFill>
+            <a:srgbClr val="C41E3A"/>
+          </a:solidFill>
+          <a:ln>
+            <a:noFill/>
+          </a:ln>
+        </p:spPr>
+        <p:style>
+          <a:lnRef idx="1">
+            <a:schemeClr val="accent1"/>
+          </a:lnRef>
+          <a:fillRef idx="3">
+            <a:schemeClr val="accent1"/>
+          </a:fillRef>
+          <a:effectRef idx="2">
+            <a:schemeClr val="accent1"/>
+          </a:effectRef>
+          <a:fontRef idx="minor">
+            <a:schemeClr val="lt1"/>
+          </a:fontRef>
+        </p:style>
+        <p:txBody>
+          <a:bodyPr rtlCol="0" anchor="ctr"/>
+          <a:lstStyle/>
+          <a:p>
+            <a:pPr algn="ctr"/>
+          </a:p>
+        </p:txBody>
+      </p:sp>
+      <p:sp>
+        <p:nvSpPr>
+          <p:cNvPr id="8" name="TextBox 7"/>
+          <p:cNvSpPr txBox="1"/>
+          <p:nvPr/>
+        </p:nvSpPr>
+        <p:spPr>
+          <a:xfrm>
+            <a:off x="548640" y="713231"/>
+            <a:ext cx="1645920" cy="320040"/>
+          </a:xfrm>
+          <a:prstGeom prst="rect">
+            <a:avLst/>
+          </a:prstGeom>
+          <a:noFill/>
+        </p:spPr>
+        <p:txBody>
+          <a:bodyPr wrap="none">
+            <a:spAutoFit/>
+          </a:bodyPr>
+          <a:lstStyle/>
+          <a:p>
+            <a:pPr algn="ctr">
+              <a:defRPr sz="1400" b="1">
+                <a:solidFill>
+                  <a:srgbClr val="FFFFFF"/>
+                </a:solidFill>
+                <a:latin typeface="Arial"/>
+              </a:defRPr>
+            </a:pPr>
+            <a:r>
+              <a:t>ÜBUNG</a:t>
+            </a:r>
+          </a:p>
+        </p:txBody>
+      </p:sp>
+      <p:sp>
+        <p:nvSpPr>
+          <p:cNvPr id="9" name="TextBox 8"/>
+          <p:cNvSpPr txBox="1"/>
+          <p:nvPr/>
+        </p:nvSpPr>
+        <p:spPr>
+          <a:xfrm>
+            <a:off x="457200" y="1280160"/>
+            <a:ext cx="11274552" cy="731520"/>
+          </a:xfrm>
+          <a:prstGeom prst="rect">
+            <a:avLst/>
+          </a:prstGeom>
+          <a:noFill/>
+        </p:spPr>
+        <p:txBody>
+          <a:bodyPr wrap="none">
+            <a:spAutoFit/>
+          </a:bodyPr>
+          <a:lstStyle/>
+          <a:p>
+            <a:pPr algn="l">
+              <a:defRPr sz="3200" b="1">
+                <a:solidFill>
+                  <a:srgbClr val="C41E3A"/>
+                </a:solidFill>
+                <a:latin typeface="Arial"/>
+              </a:defRPr>
+            </a:pPr>
+            <a:r>
+              <a:t>✏️ Übung: Übersetzen</a:t>
+            </a:r>
+          </a:p>
+        </p:txBody>
+      </p:sp>
+      <p:sp>
+        <p:nvSpPr>
+          <p:cNvPr id="10" name="TextBox 9"/>
+          <p:cNvSpPr txBox="1"/>
+          <p:nvPr/>
+        </p:nvSpPr>
+        <p:spPr>
+          <a:xfrm>
+            <a:off x="640080" y="2011680"/>
+            <a:ext cx="5029200" cy="548640"/>
+          </a:xfrm>
+          <a:prstGeom prst="rect">
+            <a:avLst/>
+          </a:prstGeom>
+          <a:noFill/>
+        </p:spPr>
+        <p:txBody>
+          <a:bodyPr wrap="none">
+            <a:spAutoFit/>
+          </a:bodyPr>
+          <a:lstStyle/>
+          <a:p>
+            <a:pPr algn="l">
+              <a:defRPr sz="2200" b="1">
+                <a:solidFill>
+                  <a:srgbClr val="C41E3A"/>
+                </a:solidFill>
+                <a:latin typeface="Arial"/>
+              </a:defRPr>
+            </a:pPr>
+            <a:r>
+              <a:t>Wir gehen ins Kino.</a:t>
+            </a:r>
+          </a:p>
+        </p:txBody>
+      </p:sp>
+      <p:sp>
+        <p:nvSpPr>
+          <p:cNvPr id="11" name="TextBox 10"/>
+          <p:cNvSpPr txBox="1"/>
+          <p:nvPr/>
+        </p:nvSpPr>
+        <p:spPr>
+          <a:xfrm>
+            <a:off x="5943600" y="2011680"/>
+            <a:ext cx="5029200" cy="548640"/>
+          </a:xfrm>
+          <a:prstGeom prst="rect">
+            <a:avLst/>
+          </a:prstGeom>
+          <a:noFill/>
+        </p:spPr>
+        <p:txBody>
+          <a:bodyPr wrap="none">
+            <a:spAutoFit/>
+          </a:bodyPr>
+          <a:lstStyle/>
+          <a:p>
+            <a:pPr algn="l">
+              <a:defRPr sz="2200" b="0">
+                <a:solidFill>
+                  <a:srgbClr val="888888"/>
+                </a:solidFill>
+                <a:latin typeface="Arial"/>
+              </a:defRPr>
+            </a:pPr>
+            <a:r>
+              <a:t>___</a:t>
+            </a:r>
+          </a:p>
+        </p:txBody>
+      </p:sp>
+      <p:sp>
+        <p:nvSpPr>
+          <p:cNvPr id="12" name="TextBox 11"/>
+          <p:cNvSpPr txBox="1"/>
+          <p:nvPr/>
+        </p:nvSpPr>
+        <p:spPr>
+          <a:xfrm>
+            <a:off x="640080" y="2926080"/>
+            <a:ext cx="5029200" cy="548640"/>
+          </a:xfrm>
+          <a:prstGeom prst="rect">
+            <a:avLst/>
+          </a:prstGeom>
+          <a:noFill/>
+        </p:spPr>
+        <p:txBody>
+          <a:bodyPr wrap="none">
+            <a:spAutoFit/>
+          </a:bodyPr>
+          <a:lstStyle/>
+          <a:p>
+            <a:pPr algn="l">
+              <a:defRPr sz="2200" b="1">
+                <a:solidFill>
+                  <a:srgbClr val="C41E3A"/>
+                </a:solidFill>
+                <a:latin typeface="Arial"/>
+              </a:defRPr>
+            </a:pPr>
+            <a:r>
+              <a:t>Sie ist im Park.</a:t>
+            </a:r>
+          </a:p>
+        </p:txBody>
+      </p:sp>
+      <p:sp>
+        <p:nvSpPr>
+          <p:cNvPr id="13" name="TextBox 12"/>
+          <p:cNvSpPr txBox="1"/>
+          <p:nvPr/>
+        </p:nvSpPr>
+        <p:spPr>
+          <a:xfrm>
+            <a:off x="5943600" y="2926080"/>
+            <a:ext cx="5029200" cy="548640"/>
+          </a:xfrm>
+          <a:prstGeom prst="rect">
+            <a:avLst/>
+          </a:prstGeom>
+          <a:noFill/>
+        </p:spPr>
+        <p:txBody>
+          <a:bodyPr wrap="none">
+            <a:spAutoFit/>
+          </a:bodyPr>
+          <a:lstStyle/>
+          <a:p>
+            <a:pPr algn="l">
+              <a:defRPr sz="2200" b="0">
+                <a:solidFill>
+                  <a:srgbClr val="888888"/>
+                </a:solidFill>
+                <a:latin typeface="Arial"/>
+              </a:defRPr>
+            </a:pPr>
+            <a:r>
+              <a:t>___</a:t>
+            </a:r>
+          </a:p>
+        </p:txBody>
+      </p:sp>
+      <p:sp>
+        <p:nvSpPr>
+          <p:cNvPr id="14" name="Rectangle 13"/>
+          <p:cNvSpPr/>
+          <p:nvPr/>
+        </p:nvSpPr>
+        <p:spPr>
+          <a:xfrm>
+            <a:off x="457200" y="5943600"/>
+            <a:ext cx="11274552" cy="548640"/>
+          </a:xfrm>
+          <a:prstGeom prst="rect">
+            <a:avLst/>
+          </a:prstGeom>
+          <a:solidFill>
+            <a:srgbClr val="FDF2F4"/>
+          </a:solidFill>
+          <a:ln>
+            <a:solidFill>
+              <a:srgbClr val="C41E3A"/>
+            </a:solidFill>
+          </a:ln>
+        </p:spPr>
+        <p:style>
+          <a:lnRef idx="1">
+            <a:schemeClr val="accent1"/>
+          </a:lnRef>
+          <a:fillRef idx="3">
+            <a:schemeClr val="accent1"/>
+          </a:fillRef>
+          <a:effectRef idx="2">
+            <a:schemeClr val="accent1"/>
+          </a:effectRef>
+          <a:fontRef idx="minor">
+            <a:schemeClr val="lt1"/>
+          </a:fontRef>
+        </p:style>
+        <p:txBody>
+          <a:bodyPr rtlCol="0" anchor="ctr"/>
+          <a:lstStyle/>
+          <a:p>
+            <a:pPr algn="ctr"/>
+          </a:p>
+        </p:txBody>
+      </p:sp>
+      <p:sp>
+        <p:nvSpPr>
+          <p:cNvPr id="15" name="TextBox 14"/>
+          <p:cNvSpPr txBox="1"/>
+          <p:nvPr/>
+        </p:nvSpPr>
+        <p:spPr>
+          <a:xfrm>
+            <a:off x="640080" y="6053328"/>
+            <a:ext cx="10972800" cy="365760"/>
+          </a:xfrm>
+          <a:prstGeom prst="rect">
+            <a:avLst/>
+          </a:prstGeom>
+          <a:noFill/>
+        </p:spPr>
+        <p:txBody>
+          <a:bodyPr wrap="none">
+            <a:spAutoFit/>
+          </a:bodyPr>
+          <a:lstStyle/>
+          <a:p>
+            <a:pPr algn="l">
+              <a:defRPr sz="1400" b="1">
+                <a:solidFill>
+                  <a:srgbClr val="C41E3A"/>
+                </a:solidFill>
+                <a:latin typeface="Arial"/>
+              </a:defRPr>
+            </a:pPr>
+            <a:r>
+              <a:t>📝 AB-06b: Aufgabe 3</a:t>
+            </a:r>
+          </a:p>
+        </p:txBody>
+      </p:sp>
+    </p:spTree>
+  </p:cSld>
+  <p:clrMapOvr>
+    <a:masterClrMapping/>
+  </p:clrMapOvr>
+</p:sld>
+</file>
+
+<file path=ppt/slides/slide13.xml><?xml version="1.0" encoding="utf-8"?>
+<p:sld xmlns:a="http://schemas.openxmlformats.org/drawingml/2006/main" xmlns:p="http://schemas.openxmlformats.org/presentationml/2006/main" xmlns:r="http://schemas.openxmlformats.org/officeDocument/2006/relationships">
+  <p:cSld>
+    <p:spTree>
+      <p:nvGrpSpPr>
+        <p:cNvPr id="1" name=""/>
+        <p:cNvGrpSpPr/>
+        <p:nvPr/>
+      </p:nvGrpSpPr>
+      <p:grpSpPr/>
+      <p:sp>
+        <p:nvSpPr>
+          <p:cNvPr id="2" name="Rectangle 1"/>
+          <p:cNvSpPr/>
+          <p:nvPr/>
+        </p:nvSpPr>
+        <p:spPr>
+          <a:xfrm>
+            <a:off x="0" y="0"/>
+            <a:ext cx="12191695" cy="457200"/>
+          </a:xfrm>
+          <a:prstGeom prst="rect">
+            <a:avLst/>
+          </a:prstGeom>
+          <a:solidFill>
+            <a:srgbClr val="C41E3A"/>
+          </a:solidFill>
+          <a:ln>
+            <a:noFill/>
+          </a:ln>
+        </p:spPr>
+        <p:style>
+          <a:lnRef idx="1">
+            <a:schemeClr val="accent1"/>
+          </a:lnRef>
+          <a:fillRef idx="3">
+            <a:schemeClr val="accent1"/>
+          </a:fillRef>
+          <a:effectRef idx="2">
+            <a:schemeClr val="accent1"/>
+          </a:effectRef>
+          <a:fontRef idx="minor">
+            <a:schemeClr val="lt1"/>
+          </a:fontRef>
+        </p:style>
+        <p:txBody>
+          <a:bodyPr rtlCol="0" anchor="ctr"/>
+          <a:lstStyle/>
+          <a:p>
+            <a:pPr algn="ctr"/>
+          </a:p>
+        </p:txBody>
+      </p:sp>
+      <p:sp>
+        <p:nvSpPr>
+          <p:cNvPr id="3" name="TextBox 2"/>
+          <p:cNvSpPr txBox="1"/>
+          <p:nvPr/>
+        </p:nvSpPr>
+        <p:spPr>
+          <a:xfrm>
+            <a:off x="274320" y="91440"/>
+            <a:ext cx="3657600" cy="274320"/>
+          </a:xfrm>
+          <a:prstGeom prst="rect">
+            <a:avLst/>
+          </a:prstGeom>
+          <a:noFill/>
+        </p:spPr>
+        <p:txBody>
+          <a:bodyPr wrap="none">
+            <a:spAutoFit/>
+          </a:bodyPr>
+          <a:lstStyle/>
+          <a:p>
+            <a:pPr algn="l">
+              <a:defRPr sz="1400" b="1">
+                <a:solidFill>
+                  <a:srgbClr val="FFFFFF"/>
+                </a:solidFill>
+                <a:latin typeface="Arial"/>
+              </a:defRPr>
+            </a:pPr>
+            <a:r>
+              <a:t>Spanisch Klasse 7 · LP-06b</a:t>
+            </a:r>
+          </a:p>
+        </p:txBody>
+      </p:sp>
+      <p:sp>
+        <p:nvSpPr>
+          <p:cNvPr id="4" name="Rectangle 3"/>
+          <p:cNvSpPr/>
+          <p:nvPr/>
+        </p:nvSpPr>
+        <p:spPr>
+          <a:xfrm>
+            <a:off x="0" y="6583680"/>
+            <a:ext cx="12191695" cy="274320"/>
+          </a:xfrm>
+          <a:prstGeom prst="rect">
+            <a:avLst/>
+          </a:prstGeom>
+          <a:solidFill>
+            <a:srgbClr val="F5F5F5"/>
+          </a:solidFill>
+          <a:ln>
+            <a:noFill/>
+          </a:ln>
+        </p:spPr>
+        <p:style>
+          <a:lnRef idx="1">
+            <a:schemeClr val="accent1"/>
+          </a:lnRef>
+          <a:fillRef idx="3">
+            <a:schemeClr val="accent1"/>
+          </a:fillRef>
+          <a:effectRef idx="2">
+            <a:schemeClr val="accent1"/>
+          </a:effectRef>
+          <a:fontRef idx="minor">
+            <a:schemeClr val="lt1"/>
+          </a:fontRef>
+        </p:style>
+        <p:txBody>
+          <a:bodyPr rtlCol="0" anchor="ctr"/>
+          <a:lstStyle/>
+          <a:p>
+            <a:pPr algn="ctr"/>
+          </a:p>
+        </p:txBody>
+      </p:sp>
+      <p:sp>
+        <p:nvSpPr>
+          <p:cNvPr id="5" name="TextBox 4"/>
+          <p:cNvSpPr txBox="1"/>
+          <p:nvPr/>
+        </p:nvSpPr>
+        <p:spPr>
+          <a:xfrm>
+            <a:off x="274320" y="6601968"/>
+            <a:ext cx="4572000" cy="228600"/>
+          </a:xfrm>
+          <a:prstGeom prst="rect">
+            <a:avLst/>
+          </a:prstGeom>
+          <a:noFill/>
+        </p:spPr>
+        <p:txBody>
+          <a:bodyPr wrap="none">
+            <a:spAutoFit/>
+          </a:bodyPr>
+          <a:lstStyle/>
+          <a:p>
+            <a:pPr algn="l">
+              <a:defRPr sz="1000" b="0">
+                <a:solidFill>
+                  <a:srgbClr val="555555"/>
+                </a:solidFill>
+                <a:latin typeface="Arial"/>
+              </a:defRPr>
+            </a:pPr>
+            <a:r>
+              <a:t>Ir y estar</a:t>
+            </a:r>
+          </a:p>
+        </p:txBody>
+      </p:sp>
+      <p:sp>
+        <p:nvSpPr>
+          <p:cNvPr id="6" name="TextBox 5"/>
+          <p:cNvSpPr txBox="1"/>
+          <p:nvPr/>
+        </p:nvSpPr>
+        <p:spPr>
+          <a:xfrm>
+            <a:off x="9144000" y="6601968"/>
+            <a:ext cx="2743200" cy="228600"/>
+          </a:xfrm>
+          <a:prstGeom prst="rect">
+            <a:avLst/>
+          </a:prstGeom>
+          <a:noFill/>
+        </p:spPr>
+        <p:txBody>
+          <a:bodyPr wrap="none">
+            <a:spAutoFit/>
+          </a:bodyPr>
+          <a:lstStyle/>
+          <a:p>
+            <a:pPr algn="r">
+              <a:defRPr sz="1000" b="0">
+                <a:solidFill>
+                  <a:srgbClr val="555555"/>
+                </a:solidFill>
+                <a:latin typeface="Arial"/>
+              </a:defRPr>
+            </a:pPr>
+            <a:r>
+              <a:t>Sequenz 6</a:t>
+            </a:r>
+          </a:p>
+        </p:txBody>
+      </p:sp>
+      <p:sp>
+        <p:nvSpPr>
+          <p:cNvPr id="7" name="TextBox 6"/>
+          <p:cNvSpPr txBox="1"/>
+          <p:nvPr/>
+        </p:nvSpPr>
+        <p:spPr>
+          <a:xfrm>
+            <a:off x="457200" y="640080"/>
+            <a:ext cx="11274552" cy="731520"/>
+          </a:xfrm>
+          <a:prstGeom prst="rect">
+            <a:avLst/>
+          </a:prstGeom>
+          <a:noFill/>
+        </p:spPr>
+        <p:txBody>
+          <a:bodyPr wrap="none">
+            <a:spAutoFit/>
+          </a:bodyPr>
+          <a:lstStyle/>
+          <a:p>
+            <a:pPr algn="l">
+              <a:defRPr sz="3200" b="1">
+                <a:solidFill>
+                  <a:srgbClr val="C41E3A"/>
+                </a:solidFill>
+                <a:latin typeface="Arial"/>
+              </a:defRPr>
+            </a:pPr>
+            <a:r>
+              <a:t>📋 Zusammenfassung</a:t>
+            </a:r>
+          </a:p>
+        </p:txBody>
+      </p:sp>
+      <p:sp>
+        <p:nvSpPr>
+          <p:cNvPr id="8" name="TextBox 7"/>
+          <p:cNvSpPr txBox="1"/>
+          <p:nvPr/>
+        </p:nvSpPr>
+        <p:spPr>
+          <a:xfrm>
+            <a:off x="640080" y="1463040"/>
+            <a:ext cx="5029200" cy="457200"/>
+          </a:xfrm>
+          <a:prstGeom prst="rect">
+            <a:avLst/>
+          </a:prstGeom>
+          <a:noFill/>
+        </p:spPr>
+        <p:txBody>
+          <a:bodyPr wrap="none">
+            <a:spAutoFit/>
+          </a:bodyPr>
+          <a:lstStyle/>
+          <a:p>
+            <a:pPr algn="l">
+              <a:defRPr sz="2000" b="1">
+                <a:solidFill>
+                  <a:srgbClr val="C41E3A"/>
+                </a:solidFill>
+                <a:latin typeface="Arial"/>
+              </a:defRPr>
+            </a:pPr>
+            <a:r>
+              <a:t>Vokabeln</a:t>
+            </a:r>
+          </a:p>
+        </p:txBody>
+      </p:sp>
+      <p:sp>
+        <p:nvSpPr>
+          <p:cNvPr id="9" name="TextBox 8"/>
+          <p:cNvSpPr txBox="1"/>
+          <p:nvPr/>
+        </p:nvSpPr>
+        <p:spPr>
+          <a:xfrm>
+            <a:off x="822960" y="2011680"/>
+            <a:ext cx="4846320" cy="457200"/>
+          </a:xfrm>
+          <a:prstGeom prst="rect">
+            <a:avLst/>
+          </a:prstGeom>
+          <a:noFill/>
+        </p:spPr>
+        <p:txBody>
+          <a:bodyPr wrap="none">
+            <a:spAutoFit/>
+          </a:bodyPr>
+          <a:lstStyle/>
+          <a:p>
+            <a:pPr algn="l">
+              <a:defRPr sz="1800" b="0">
+                <a:solidFill>
+                  <a:srgbClr val="222222"/>
+                </a:solidFill>
+                <a:latin typeface="Arial"/>
+              </a:defRPr>
+            </a:pPr>
+            <a:r>
+              <a:t>•  voy, vas, va</a:t>
+            </a:r>
+          </a:p>
+        </p:txBody>
+      </p:sp>
+      <p:sp>
+        <p:nvSpPr>
+          <p:cNvPr id="10" name="TextBox 9"/>
+          <p:cNvSpPr txBox="1"/>
+          <p:nvPr/>
+        </p:nvSpPr>
+        <p:spPr>
+          <a:xfrm>
+            <a:off x="822960" y="2560320"/>
+            <a:ext cx="4846320" cy="457200"/>
+          </a:xfrm>
+          <a:prstGeom prst="rect">
+            <a:avLst/>
+          </a:prstGeom>
+          <a:noFill/>
+        </p:spPr>
+        <p:txBody>
+          <a:bodyPr wrap="none">
+            <a:spAutoFit/>
+          </a:bodyPr>
+          <a:lstStyle/>
+          <a:p>
+            <a:pPr algn="l">
+              <a:defRPr sz="1800" b="0">
+                <a:solidFill>
+                  <a:srgbClr val="222222"/>
+                </a:solidFill>
+                <a:latin typeface="Arial"/>
+              </a:defRPr>
+            </a:pPr>
+            <a:r>
+              <a:t>•  vamos, vais, van</a:t>
+            </a:r>
+          </a:p>
+        </p:txBody>
+      </p:sp>
+      <p:sp>
+        <p:nvSpPr>
+          <p:cNvPr id="11" name="TextBox 10"/>
+          <p:cNvSpPr txBox="1"/>
+          <p:nvPr/>
+        </p:nvSpPr>
+        <p:spPr>
+          <a:xfrm>
+            <a:off x="822960" y="3108960"/>
+            <a:ext cx="4846320" cy="457200"/>
+          </a:xfrm>
+          <a:prstGeom prst="rect">
+            <a:avLst/>
+          </a:prstGeom>
+          <a:noFill/>
+        </p:spPr>
+        <p:txBody>
+          <a:bodyPr wrap="none">
+            <a:spAutoFit/>
+          </a:bodyPr>
+          <a:lstStyle/>
+          <a:p>
+            <a:pPr algn="l">
+              <a:defRPr sz="1800" b="0">
+                <a:solidFill>
+                  <a:srgbClr val="222222"/>
+                </a:solidFill>
+                <a:latin typeface="Arial"/>
+              </a:defRPr>
+            </a:pPr>
+            <a:r>
+              <a:t>•  ir a + Ort</a:t>
+            </a:r>
+          </a:p>
+        </p:txBody>
+      </p:sp>
+      <p:sp>
+        <p:nvSpPr>
+          <p:cNvPr id="12" name="TextBox 11"/>
+          <p:cNvSpPr txBox="1"/>
+          <p:nvPr/>
+        </p:nvSpPr>
+        <p:spPr>
+          <a:xfrm>
+            <a:off x="6400800" y="1463040"/>
+            <a:ext cx="5029200" cy="457200"/>
+          </a:xfrm>
+          <a:prstGeom prst="rect">
+            <a:avLst/>
+          </a:prstGeom>
+          <a:noFill/>
+        </p:spPr>
+        <p:txBody>
+          <a:bodyPr wrap="none">
+            <a:spAutoFit/>
+          </a:bodyPr>
+          <a:lstStyle/>
+          <a:p>
+            <a:pPr algn="l">
+              <a:defRPr sz="2000" b="1">
+                <a:solidFill>
+                  <a:srgbClr val="C41E3A"/>
+                </a:solidFill>
+                <a:latin typeface="Arial"/>
+              </a:defRPr>
+            </a:pPr>
+            <a:r>
+              <a:t>Grammatik</a:t>
+            </a:r>
+          </a:p>
+        </p:txBody>
+      </p:sp>
+      <p:sp>
+        <p:nvSpPr>
+          <p:cNvPr id="13" name="TextBox 12"/>
+          <p:cNvSpPr txBox="1"/>
+          <p:nvPr/>
+        </p:nvSpPr>
+        <p:spPr>
+          <a:xfrm>
+            <a:off x="6583680" y="2011680"/>
+            <a:ext cx="4846320" cy="457200"/>
+          </a:xfrm>
+          <a:prstGeom prst="rect">
+            <a:avLst/>
+          </a:prstGeom>
+          <a:noFill/>
+        </p:spPr>
+        <p:txBody>
+          <a:bodyPr wrap="none">
+            <a:spAutoFit/>
+          </a:bodyPr>
+          <a:lstStyle/>
+          <a:p>
+            <a:pPr algn="l">
+              <a:defRPr sz="1800" b="0">
+                <a:solidFill>
+                  <a:srgbClr val="222222"/>
+                </a:solidFill>
+                <a:latin typeface="Arial"/>
+              </a:defRPr>
+            </a:pPr>
+            <a:r>
+              <a:t>•  estoy, estás, está</a:t>
+            </a:r>
+          </a:p>
+        </p:txBody>
+      </p:sp>
+      <p:sp>
+        <p:nvSpPr>
+          <p:cNvPr id="14" name="TextBox 13"/>
+          <p:cNvSpPr txBox="1"/>
+          <p:nvPr/>
+        </p:nvSpPr>
+        <p:spPr>
+          <a:xfrm>
+            <a:off x="6583680" y="2560320"/>
+            <a:ext cx="4846320" cy="457200"/>
+          </a:xfrm>
+          <a:prstGeom prst="rect">
+            <a:avLst/>
+          </a:prstGeom>
+          <a:noFill/>
+        </p:spPr>
+        <p:txBody>
+          <a:bodyPr wrap="none">
+            <a:spAutoFit/>
+          </a:bodyPr>
+          <a:lstStyle/>
+          <a:p>
+            <a:pPr algn="l">
+              <a:defRPr sz="1800" b="0">
+                <a:solidFill>
+                  <a:srgbClr val="222222"/>
+                </a:solidFill>
+                <a:latin typeface="Arial"/>
+              </a:defRPr>
+            </a:pPr>
+            <a:r>
+              <a:t>•  estamos, estáis, están</a:t>
+            </a:r>
+          </a:p>
+        </p:txBody>
+      </p:sp>
+      <p:sp>
+        <p:nvSpPr>
+          <p:cNvPr id="15" name="TextBox 14"/>
+          <p:cNvSpPr txBox="1"/>
+          <p:nvPr/>
+        </p:nvSpPr>
+        <p:spPr>
+          <a:xfrm>
+            <a:off x="6583680" y="3108960"/>
+            <a:ext cx="4846320" cy="457200"/>
+          </a:xfrm>
+          <a:prstGeom prst="rect">
+            <a:avLst/>
+          </a:prstGeom>
+          <a:noFill/>
+        </p:spPr>
+        <p:txBody>
+          <a:bodyPr wrap="none">
+            <a:spAutoFit/>
+          </a:bodyPr>
+          <a:lstStyle/>
+          <a:p>
+            <a:pPr algn="l">
+              <a:defRPr sz="1800" b="0">
+                <a:solidFill>
+                  <a:srgbClr val="222222"/>
+                </a:solidFill>
+                <a:latin typeface="Arial"/>
+              </a:defRPr>
+            </a:pPr>
+            <a:r>
+              <a:t>•  estar en + Ort</a:t>
+            </a:r>
+          </a:p>
+        </p:txBody>
+      </p:sp>
+    </p:spTree>
+  </p:cSld>
+  <p:clrMapOvr>
+    <a:masterClrMapping/>
+  </p:clrMapOvr>
+</p:sld>
+</file>
+
+<file path=ppt/slides/slide14.xml><?xml version="1.0" encoding="utf-8"?>
+<p:sld xmlns:a="http://schemas.openxmlformats.org/drawingml/2006/main" xmlns:p="http://schemas.openxmlformats.org/presentationml/2006/main" xmlns:r="http://schemas.openxmlformats.org/officeDocument/2006/relationships">
+  <p:cSld>
+    <p:spTree>
+      <p:nvGrpSpPr>
+        <p:cNvPr id="1" name=""/>
+        <p:cNvGrpSpPr/>
+        <p:nvPr/>
+      </p:nvGrpSpPr>
+      <p:grpSpPr/>
+      <p:sp>
+        <p:nvSpPr>
+          <p:cNvPr id="2" name="Rectangle 1"/>
+          <p:cNvSpPr/>
+          <p:nvPr/>
+        </p:nvSpPr>
+        <p:spPr>
+          <a:xfrm>
+            <a:off x="0" y="0"/>
+            <a:ext cx="12191695" cy="457200"/>
+          </a:xfrm>
+          <a:prstGeom prst="rect">
+            <a:avLst/>
+          </a:prstGeom>
+          <a:solidFill>
+            <a:srgbClr val="C41E3A"/>
+          </a:solidFill>
+          <a:ln>
+            <a:noFill/>
+          </a:ln>
+        </p:spPr>
+        <p:style>
+          <a:lnRef idx="1">
+            <a:schemeClr val="accent1"/>
+          </a:lnRef>
+          <a:fillRef idx="3">
+            <a:schemeClr val="accent1"/>
+          </a:fillRef>
+          <a:effectRef idx="2">
+            <a:schemeClr val="accent1"/>
+          </a:effectRef>
+          <a:fontRef idx="minor">
+            <a:schemeClr val="lt1"/>
+          </a:fontRef>
+        </p:style>
+        <p:txBody>
+          <a:bodyPr rtlCol="0" anchor="ctr"/>
+          <a:lstStyle/>
+          <a:p>
+            <a:pPr algn="ctr"/>
+          </a:p>
+        </p:txBody>
+      </p:sp>
+      <p:sp>
+        <p:nvSpPr>
+          <p:cNvPr id="3" name="TextBox 2"/>
+          <p:cNvSpPr txBox="1"/>
+          <p:nvPr/>
+        </p:nvSpPr>
+        <p:spPr>
+          <a:xfrm>
+            <a:off x="274320" y="91440"/>
+            <a:ext cx="3657600" cy="274320"/>
+          </a:xfrm>
+          <a:prstGeom prst="rect">
+            <a:avLst/>
+          </a:prstGeom>
+          <a:noFill/>
+        </p:spPr>
+        <p:txBody>
+          <a:bodyPr wrap="none">
+            <a:spAutoFit/>
+          </a:bodyPr>
+          <a:lstStyle/>
+          <a:p>
+            <a:pPr algn="l">
+              <a:defRPr sz="1400" b="1">
+                <a:solidFill>
+                  <a:srgbClr val="FFFFFF"/>
+                </a:solidFill>
+                <a:latin typeface="Arial"/>
+              </a:defRPr>
+            </a:pPr>
+            <a:r>
+              <a:t>Spanisch Klasse 7 · LP-06b</a:t>
+            </a:r>
+          </a:p>
+        </p:txBody>
+      </p:sp>
+      <p:sp>
+        <p:nvSpPr>
+          <p:cNvPr id="4" name="Rectangle 3"/>
+          <p:cNvSpPr/>
+          <p:nvPr/>
+        </p:nvSpPr>
+        <p:spPr>
+          <a:xfrm>
+            <a:off x="0" y="6583680"/>
+            <a:ext cx="12191695" cy="274320"/>
+          </a:xfrm>
+          <a:prstGeom prst="rect">
+            <a:avLst/>
+          </a:prstGeom>
+          <a:solidFill>
+            <a:srgbClr val="F5F5F5"/>
+          </a:solidFill>
+          <a:ln>
+            <a:noFill/>
+          </a:ln>
+        </p:spPr>
+        <p:style>
+          <a:lnRef idx="1">
+            <a:schemeClr val="accent1"/>
+          </a:lnRef>
+          <a:fillRef idx="3">
+            <a:schemeClr val="accent1"/>
+          </a:fillRef>
+          <a:effectRef idx="2">
+            <a:schemeClr val="accent1"/>
+          </a:effectRef>
+          <a:fontRef idx="minor">
+            <a:schemeClr val="lt1"/>
+          </a:fontRef>
+        </p:style>
+        <p:txBody>
+          <a:bodyPr rtlCol="0" anchor="ctr"/>
+          <a:lstStyle/>
+          <a:p>
+            <a:pPr algn="ctr"/>
+          </a:p>
+        </p:txBody>
+      </p:sp>
+      <p:sp>
+        <p:nvSpPr>
+          <p:cNvPr id="5" name="TextBox 4"/>
+          <p:cNvSpPr txBox="1"/>
+          <p:nvPr/>
+        </p:nvSpPr>
+        <p:spPr>
+          <a:xfrm>
+            <a:off x="274320" y="6601968"/>
+            <a:ext cx="4572000" cy="228600"/>
+          </a:xfrm>
+          <a:prstGeom prst="rect">
+            <a:avLst/>
+          </a:prstGeom>
+          <a:noFill/>
+        </p:spPr>
+        <p:txBody>
+          <a:bodyPr wrap="none">
+            <a:spAutoFit/>
+          </a:bodyPr>
+          <a:lstStyle/>
+          <a:p>
+            <a:pPr algn="l">
+              <a:defRPr sz="1000" b="0">
+                <a:solidFill>
+                  <a:srgbClr val="555555"/>
+                </a:solidFill>
+                <a:latin typeface="Arial"/>
+              </a:defRPr>
+            </a:pPr>
+            <a:r>
+              <a:t>Ir y estar</a:t>
+            </a:r>
+          </a:p>
+        </p:txBody>
+      </p:sp>
+      <p:sp>
+        <p:nvSpPr>
+          <p:cNvPr id="6" name="TextBox 5"/>
+          <p:cNvSpPr txBox="1"/>
+          <p:nvPr/>
+        </p:nvSpPr>
+        <p:spPr>
+          <a:xfrm>
+            <a:off x="9144000" y="6601968"/>
+            <a:ext cx="2743200" cy="228600"/>
+          </a:xfrm>
+          <a:prstGeom prst="rect">
+            <a:avLst/>
+          </a:prstGeom>
+          <a:noFill/>
+        </p:spPr>
+        <p:txBody>
+          <a:bodyPr wrap="none">
+            <a:spAutoFit/>
+          </a:bodyPr>
+          <a:lstStyle/>
+          <a:p>
+            <a:pPr algn="r">
+              <a:defRPr sz="1000" b="0">
+                <a:solidFill>
+                  <a:srgbClr val="555555"/>
+                </a:solidFill>
+                <a:latin typeface="Arial"/>
+              </a:defRPr>
+            </a:pPr>
+            <a:r>
+              <a:t>Sequenz 6</a:t>
+            </a:r>
+          </a:p>
+        </p:txBody>
+      </p:sp>
+      <p:sp>
+        <p:nvSpPr>
+          <p:cNvPr id="7" name="Rectangle 6"/>
+          <p:cNvSpPr/>
+          <p:nvPr/>
+        </p:nvSpPr>
+        <p:spPr>
+          <a:xfrm>
+            <a:off x="457200" y="640080"/>
+            <a:ext cx="1828800" cy="457200"/>
+          </a:xfrm>
+          <a:prstGeom prst="rect">
+            <a:avLst/>
+          </a:prstGeom>
+          <a:solidFill>
+            <a:srgbClr val="C41E3A"/>
+          </a:solidFill>
+          <a:ln>
+            <a:noFill/>
+          </a:ln>
+        </p:spPr>
+        <p:style>
+          <a:lnRef idx="1">
+            <a:schemeClr val="accent1"/>
+          </a:lnRef>
+          <a:fillRef idx="3">
+            <a:schemeClr val="accent1"/>
+          </a:fillRef>
+          <a:effectRef idx="2">
+            <a:schemeClr val="accent1"/>
+          </a:effectRef>
+          <a:fontRef idx="minor">
+            <a:schemeClr val="lt1"/>
+          </a:fontRef>
+        </p:style>
+        <p:txBody>
+          <a:bodyPr rtlCol="0" anchor="ctr"/>
+          <a:lstStyle/>
+          <a:p>
+            <a:pPr algn="ctr"/>
+          </a:p>
+        </p:txBody>
+      </p:sp>
+      <p:sp>
+        <p:nvSpPr>
+          <p:cNvPr id="8" name="TextBox 7"/>
+          <p:cNvSpPr txBox="1"/>
+          <p:nvPr/>
+        </p:nvSpPr>
+        <p:spPr>
+          <a:xfrm>
+            <a:off x="548640" y="713231"/>
+            <a:ext cx="1645920" cy="320040"/>
+          </a:xfrm>
+          <a:prstGeom prst="rect">
+            <a:avLst/>
+          </a:prstGeom>
+          <a:noFill/>
+        </p:spPr>
+        <p:txBody>
+          <a:bodyPr wrap="none">
+            <a:spAutoFit/>
+          </a:bodyPr>
+          <a:lstStyle/>
+          <a:p>
+            <a:pPr algn="ctr">
+              <a:defRPr sz="1400" b="1">
+                <a:solidFill>
+                  <a:srgbClr val="FFFFFF"/>
+                </a:solidFill>
+                <a:latin typeface="Arial"/>
+              </a:defRPr>
+            </a:pPr>
+            <a:r>
+              <a:t>HAUSAUFGABE</a:t>
+            </a:r>
+          </a:p>
+        </p:txBody>
+      </p:sp>
+      <p:sp>
+        <p:nvSpPr>
+          <p:cNvPr id="9" name="TextBox 8"/>
+          <p:cNvSpPr txBox="1"/>
+          <p:nvPr/>
+        </p:nvSpPr>
+        <p:spPr>
+          <a:xfrm>
+            <a:off x="457200" y="1280160"/>
+            <a:ext cx="11274552" cy="731520"/>
+          </a:xfrm>
+          <a:prstGeom prst="rect">
+            <a:avLst/>
+          </a:prstGeom>
+          <a:noFill/>
+        </p:spPr>
+        <p:txBody>
+          <a:bodyPr wrap="none">
+            <a:spAutoFit/>
+          </a:bodyPr>
+          <a:lstStyle/>
+          <a:p>
+            <a:pPr algn="l">
+              <a:defRPr sz="3200" b="1">
+                <a:solidFill>
+                  <a:srgbClr val="C41E3A"/>
+                </a:solidFill>
+                <a:latin typeface="Arial"/>
+              </a:defRPr>
+            </a:pPr>
+            <a:r>
+              <a:t>📚 Para casa</a:t>
+            </a:r>
+          </a:p>
+        </p:txBody>
+      </p:sp>
+      <p:sp>
+        <p:nvSpPr>
+          <p:cNvPr id="10" name="TextBox 9"/>
+          <p:cNvSpPr txBox="1"/>
+          <p:nvPr/>
+        </p:nvSpPr>
+        <p:spPr>
+          <a:xfrm>
+            <a:off x="640080" y="2103120"/>
+            <a:ext cx="457200" cy="457200"/>
+          </a:xfrm>
+          <a:prstGeom prst="rect">
+            <a:avLst/>
+          </a:prstGeom>
+          <a:noFill/>
+        </p:spPr>
+        <p:txBody>
+          <a:bodyPr wrap="none">
+            <a:spAutoFit/>
+          </a:bodyPr>
+          <a:lstStyle/>
+          <a:p>
+            <a:pPr algn="l">
+              <a:defRPr sz="2400" b="1">
+                <a:solidFill>
+                  <a:srgbClr val="2A7A4B"/>
+                </a:solidFill>
+                <a:latin typeface="Arial"/>
+              </a:defRPr>
+            </a:pPr>
+            <a:r>
+              <a:t>✓</a:t>
+            </a:r>
+          </a:p>
+        </p:txBody>
+      </p:sp>
+      <p:sp>
+        <p:nvSpPr>
+          <p:cNvPr id="11" name="TextBox 10"/>
+          <p:cNvSpPr txBox="1"/>
+          <p:nvPr/>
+        </p:nvSpPr>
+        <p:spPr>
+          <a:xfrm>
+            <a:off x="1188720" y="2103120"/>
+            <a:ext cx="10058400" cy="457200"/>
+          </a:xfrm>
+          <a:prstGeom prst="rect">
+            <a:avLst/>
+          </a:prstGeom>
+          <a:noFill/>
+        </p:spPr>
+        <p:txBody>
+          <a:bodyPr wrap="none">
+            <a:spAutoFit/>
+          </a:bodyPr>
+          <a:lstStyle/>
+          <a:p>
+            <a:pPr algn="l">
+              <a:defRPr sz="2000" b="0">
+                <a:solidFill>
+                  <a:srgbClr val="222222"/>
+                </a:solidFill>
+                <a:latin typeface="Arial"/>
+              </a:defRPr>
+            </a:pPr>
+            <a:r>
+              <a:t>ir und estar konjugieren</a:t>
+            </a:r>
+          </a:p>
+        </p:txBody>
+      </p:sp>
+      <p:sp>
+        <p:nvSpPr>
+          <p:cNvPr id="12" name="TextBox 11"/>
+          <p:cNvSpPr txBox="1"/>
+          <p:nvPr/>
+        </p:nvSpPr>
+        <p:spPr>
+          <a:xfrm>
+            <a:off x="640080" y="2926079"/>
+            <a:ext cx="457200" cy="457200"/>
+          </a:xfrm>
+          <a:prstGeom prst="rect">
+            <a:avLst/>
+          </a:prstGeom>
+          <a:noFill/>
+        </p:spPr>
+        <p:txBody>
+          <a:bodyPr wrap="none">
+            <a:spAutoFit/>
+          </a:bodyPr>
+          <a:lstStyle/>
+          <a:p>
+            <a:pPr algn="l">
+              <a:defRPr sz="2400" b="1">
+                <a:solidFill>
+                  <a:srgbClr val="2A7A4B"/>
+                </a:solidFill>
+                <a:latin typeface="Arial"/>
+              </a:defRPr>
+            </a:pPr>
+            <a:r>
+              <a:t>✓</a:t>
+            </a:r>
+          </a:p>
+        </p:txBody>
+      </p:sp>
+      <p:sp>
+        <p:nvSpPr>
+          <p:cNvPr id="13" name="TextBox 12"/>
+          <p:cNvSpPr txBox="1"/>
+          <p:nvPr/>
+        </p:nvSpPr>
+        <p:spPr>
+          <a:xfrm>
+            <a:off x="1188720" y="2926079"/>
+            <a:ext cx="10058400" cy="457200"/>
+          </a:xfrm>
+          <a:prstGeom prst="rect">
+            <a:avLst/>
+          </a:prstGeom>
+          <a:noFill/>
+        </p:spPr>
+        <p:txBody>
+          <a:bodyPr wrap="none">
+            <a:spAutoFit/>
+          </a:bodyPr>
+          <a:lstStyle/>
+          <a:p>
+            <a:pPr algn="l">
+              <a:defRPr sz="2000" b="0">
+                <a:solidFill>
+                  <a:srgbClr val="222222"/>
+                </a:solidFill>
+                <a:latin typeface="Arial"/>
+              </a:defRPr>
+            </a:pPr>
+            <a:r>
+              <a:t>Sätze mit ir a / estar en</a:t>
+            </a:r>
+          </a:p>
+        </p:txBody>
+      </p:sp>
+      <p:sp>
+        <p:nvSpPr>
+          <p:cNvPr id="14" name="TextBox 13"/>
+          <p:cNvSpPr txBox="1"/>
+          <p:nvPr/>
+        </p:nvSpPr>
+        <p:spPr>
+          <a:xfrm>
+            <a:off x="640080" y="3749039"/>
+            <a:ext cx="457200" cy="457200"/>
+          </a:xfrm>
+          <a:prstGeom prst="rect">
+            <a:avLst/>
+          </a:prstGeom>
+          <a:noFill/>
+        </p:spPr>
+        <p:txBody>
+          <a:bodyPr wrap="none">
+            <a:spAutoFit/>
+          </a:bodyPr>
+          <a:lstStyle/>
+          <a:p>
+            <a:pPr algn="l">
+              <a:defRPr sz="2400" b="1">
+                <a:solidFill>
+                  <a:srgbClr val="2A7A4B"/>
+                </a:solidFill>
+                <a:latin typeface="Arial"/>
+              </a:defRPr>
+            </a:pPr>
+            <a:r>
+              <a:t>✓</a:t>
+            </a:r>
+          </a:p>
+        </p:txBody>
+      </p:sp>
+      <p:sp>
+        <p:nvSpPr>
+          <p:cNvPr id="15" name="TextBox 14"/>
+          <p:cNvSpPr txBox="1"/>
+          <p:nvPr/>
+        </p:nvSpPr>
+        <p:spPr>
+          <a:xfrm>
+            <a:off x="1188720" y="3749039"/>
+            <a:ext cx="10058400" cy="457200"/>
+          </a:xfrm>
+          <a:prstGeom prst="rect">
+            <a:avLst/>
+          </a:prstGeom>
+          <a:noFill/>
+        </p:spPr>
+        <p:txBody>
+          <a:bodyPr wrap="none">
+            <a:spAutoFit/>
+          </a:bodyPr>
+          <a:lstStyle/>
+          <a:p>
+            <a:pPr algn="l">
+              <a:defRPr sz="2000" b="0">
+                <a:solidFill>
+                  <a:srgbClr val="222222"/>
+                </a:solidFill>
+                <a:latin typeface="Arial"/>
+              </a:defRPr>
+            </a:pPr>
+            <a:r>
+              <a:t>AB-06b vollständig</a:t>
+            </a:r>
+          </a:p>
+        </p:txBody>
+      </p:sp>
+      <p:sp>
+        <p:nvSpPr>
+          <p:cNvPr id="16" name="TextBox 15"/>
+          <p:cNvSpPr txBox="1"/>
+          <p:nvPr/>
+        </p:nvSpPr>
+        <p:spPr>
+          <a:xfrm>
+            <a:off x="457200" y="5760720"/>
+            <a:ext cx="11274552" cy="548640"/>
+          </a:xfrm>
+          <a:prstGeom prst="rect">
+            <a:avLst/>
+          </a:prstGeom>
+          <a:noFill/>
+        </p:spPr>
+        <p:txBody>
+          <a:bodyPr wrap="none">
+            <a:spAutoFit/>
+          </a:bodyPr>
+          <a:lstStyle/>
+          <a:p>
+            <a:pPr algn="ctr">
+              <a:defRPr sz="3200" b="1">
+                <a:solidFill>
+                  <a:srgbClr val="C41E3A"/>
+                </a:solidFill>
+                <a:latin typeface="Arial"/>
+              </a:defRPr>
+            </a:pPr>
+            <a:r>
+              <a:t>¡Hasta luego!</a:t>
+            </a:r>
+          </a:p>
+        </p:txBody>
+      </p:sp>
+    </p:spTree>
+  </p:cSld>
+  <p:clrMapOvr>
+    <a:masterClrMapping/>
+  </p:clrMapOvr>
+</p:sld>
+</file>
+
 <file path=ppt/slides/slide2.xml><?xml version="1.0" encoding="utf-8"?>
 <p:sld xmlns:a="http://schemas.openxmlformats.org/drawingml/2006/main" xmlns:p="http://schemas.openxmlformats.org/presentationml/2006/main" xmlns:r="http://schemas.openxmlformats.org/officeDocument/2006/relationships">
   <p:cSld>
@@ -3558,7 +6257,7 @@
               </a:defRPr>
             </a:pPr>
             <a:r>
-              <a:t>📝 ir = gehen</a:t>
+              <a:t>Lernziele</a:t>
             </a:r>
           </a:p>
         </p:txBody>
@@ -3572,29 +6271,29 @@
         <p:spPr>
           <a:xfrm>
             <a:off x="640080" y="1463040"/>
-            <a:ext cx="5029200" cy="731520"/>
-          </a:xfrm>
-          <a:prstGeom prst="rect">
-            <a:avLst/>
-          </a:prstGeom>
-          <a:noFill/>
-        </p:spPr>
-        <p:txBody>
-          <a:bodyPr wrap="none">
-            <a:spAutoFit/>
-          </a:bodyPr>
-          <a:lstStyle/>
-          <a:p>
-            <a:pPr algn="l">
-              <a:defRPr sz="2800" b="1">
-                <a:solidFill>
-                  <a:srgbClr val="C41E3A"/>
-                </a:solidFill>
-                <a:latin typeface="Arial"/>
-              </a:defRPr>
-            </a:pPr>
-            <a:r>
-              <a:t>yo voy</a:t>
+            <a:ext cx="10972800" cy="548640"/>
+          </a:xfrm>
+          <a:prstGeom prst="rect">
+            <a:avLst/>
+          </a:prstGeom>
+          <a:noFill/>
+        </p:spPr>
+        <p:txBody>
+          <a:bodyPr wrap="none">
+            <a:spAutoFit/>
+          </a:bodyPr>
+          <a:lstStyle/>
+          <a:p>
+            <a:pPr algn="l">
+              <a:defRPr sz="2000" b="0">
+                <a:solidFill>
+                  <a:srgbClr val="222222"/>
+                </a:solidFill>
+                <a:latin typeface="Arial"/>
+              </a:defRPr>
+            </a:pPr>
+            <a:r>
+              <a:t>ir (gehen) konjugieren</a:t>
             </a:r>
           </a:p>
         </p:txBody>
@@ -3607,30 +6306,30 @@
         </p:nvSpPr>
         <p:spPr>
           <a:xfrm>
-            <a:off x="5943600" y="1554480"/>
-            <a:ext cx="5486400" cy="548640"/>
-          </a:xfrm>
-          <a:prstGeom prst="rect">
-            <a:avLst/>
-          </a:prstGeom>
-          <a:noFill/>
-        </p:spPr>
-        <p:txBody>
-          <a:bodyPr wrap="none">
-            <a:spAutoFit/>
-          </a:bodyPr>
-          <a:lstStyle/>
-          <a:p>
-            <a:pPr algn="l">
-              <a:defRPr sz="1800" b="0">
-                <a:solidFill>
-                  <a:srgbClr val="555555"/>
-                </a:solidFill>
-                <a:latin typeface="Arial"/>
-              </a:defRPr>
-            </a:pPr>
-            <a:r>
-              <a:t>ich gehe</a:t>
+            <a:off x="640080" y="2194560"/>
+            <a:ext cx="10972800" cy="548640"/>
+          </a:xfrm>
+          <a:prstGeom prst="rect">
+            <a:avLst/>
+          </a:prstGeom>
+          <a:noFill/>
+        </p:spPr>
+        <p:txBody>
+          <a:bodyPr wrap="none">
+            <a:spAutoFit/>
+          </a:bodyPr>
+          <a:lstStyle/>
+          <a:p>
+            <a:pPr algn="l">
+              <a:defRPr sz="2000" b="0">
+                <a:solidFill>
+                  <a:srgbClr val="222222"/>
+                </a:solidFill>
+                <a:latin typeface="Arial"/>
+              </a:defRPr>
+            </a:pPr>
+            <a:r>
+              <a:t>estar (sich befinden) konjugieren</a:t>
             </a:r>
           </a:p>
         </p:txBody>
@@ -3643,138 +6342,30 @@
         </p:nvSpPr>
         <p:spPr>
           <a:xfrm>
-            <a:off x="640080" y="2560320"/>
-            <a:ext cx="5029200" cy="731520"/>
-          </a:xfrm>
-          <a:prstGeom prst="rect">
-            <a:avLst/>
-          </a:prstGeom>
-          <a:noFill/>
-        </p:spPr>
-        <p:txBody>
-          <a:bodyPr wrap="none">
-            <a:spAutoFit/>
-          </a:bodyPr>
-          <a:lstStyle/>
-          <a:p>
-            <a:pPr algn="l">
-              <a:defRPr sz="2800" b="1">
-                <a:solidFill>
-                  <a:srgbClr val="C41E3A"/>
-                </a:solidFill>
-                <a:latin typeface="Arial"/>
-              </a:defRPr>
-            </a:pPr>
-            <a:r>
-              <a:t>tú vas</a:t>
-            </a:r>
-          </a:p>
-        </p:txBody>
-      </p:sp>
-      <p:sp>
-        <p:nvSpPr>
-          <p:cNvPr id="11" name="TextBox 10"/>
-          <p:cNvSpPr txBox="1"/>
-          <p:nvPr/>
-        </p:nvSpPr>
-        <p:spPr>
-          <a:xfrm>
-            <a:off x="5943600" y="2651760"/>
-            <a:ext cx="5486400" cy="548640"/>
-          </a:xfrm>
-          <a:prstGeom prst="rect">
-            <a:avLst/>
-          </a:prstGeom>
-          <a:noFill/>
-        </p:spPr>
-        <p:txBody>
-          <a:bodyPr wrap="none">
-            <a:spAutoFit/>
-          </a:bodyPr>
-          <a:lstStyle/>
-          <a:p>
-            <a:pPr algn="l">
-              <a:defRPr sz="1800" b="0">
-                <a:solidFill>
-                  <a:srgbClr val="555555"/>
-                </a:solidFill>
-                <a:latin typeface="Arial"/>
-              </a:defRPr>
-            </a:pPr>
-            <a:r>
-              <a:t>du gehst</a:t>
-            </a:r>
-          </a:p>
-        </p:txBody>
-      </p:sp>
-      <p:sp>
-        <p:nvSpPr>
-          <p:cNvPr id="12" name="TextBox 11"/>
-          <p:cNvSpPr txBox="1"/>
-          <p:nvPr/>
-        </p:nvSpPr>
-        <p:spPr>
-          <a:xfrm>
-            <a:off x="640080" y="3657600"/>
-            <a:ext cx="5029200" cy="731520"/>
-          </a:xfrm>
-          <a:prstGeom prst="rect">
-            <a:avLst/>
-          </a:prstGeom>
-          <a:noFill/>
-        </p:spPr>
-        <p:txBody>
-          <a:bodyPr wrap="none">
-            <a:spAutoFit/>
-          </a:bodyPr>
-          <a:lstStyle/>
-          <a:p>
-            <a:pPr algn="l">
-              <a:defRPr sz="2800" b="1">
-                <a:solidFill>
-                  <a:srgbClr val="C41E3A"/>
-                </a:solidFill>
-                <a:latin typeface="Arial"/>
-              </a:defRPr>
-            </a:pPr>
-            <a:r>
-              <a:t>Voy al cine.</a:t>
-            </a:r>
-          </a:p>
-        </p:txBody>
-      </p:sp>
-      <p:sp>
-        <p:nvSpPr>
-          <p:cNvPr id="13" name="TextBox 12"/>
-          <p:cNvSpPr txBox="1"/>
-          <p:nvPr/>
-        </p:nvSpPr>
-        <p:spPr>
-          <a:xfrm>
-            <a:off x="5943600" y="3749039"/>
-            <a:ext cx="5486400" cy="548640"/>
-          </a:xfrm>
-          <a:prstGeom prst="rect">
-            <a:avLst/>
-          </a:prstGeom>
-          <a:noFill/>
-        </p:spPr>
-        <p:txBody>
-          <a:bodyPr wrap="none">
-            <a:spAutoFit/>
-          </a:bodyPr>
-          <a:lstStyle/>
-          <a:p>
-            <a:pPr algn="l">
-              <a:defRPr sz="1800" b="0">
-                <a:solidFill>
-                  <a:srgbClr val="555555"/>
-                </a:solidFill>
-                <a:latin typeface="Arial"/>
-              </a:defRPr>
-            </a:pPr>
-            <a:r>
-              <a:t>Ich gehe ins Kino.</a:t>
+            <a:off x="640080" y="2926080"/>
+            <a:ext cx="10972800" cy="548640"/>
+          </a:xfrm>
+          <a:prstGeom prst="rect">
+            <a:avLst/>
+          </a:prstGeom>
+          <a:noFill/>
+        </p:spPr>
+        <p:txBody>
+          <a:bodyPr wrap="none">
+            <a:spAutoFit/>
+          </a:bodyPr>
+          <a:lstStyle/>
+          <a:p>
+            <a:pPr algn="l">
+              <a:defRPr sz="2000" b="0">
+                <a:solidFill>
+                  <a:srgbClr val="222222"/>
+                </a:solidFill>
+                <a:latin typeface="Arial"/>
+              </a:defRPr>
+            </a:pPr>
+            <a:r>
+              <a:t>ir a vs. estar en</a:t>
             </a:r>
           </a:p>
         </p:txBody>
@@ -4022,7 +6613,7 @@
               </a:defRPr>
             </a:pPr>
             <a:r>
-              <a:t>📝 estar = sich befinden</a:t>
+              <a:t>📝 ir (gehen): Konjugation</a:t>
             </a:r>
           </a:p>
         </p:txBody>
@@ -4058,7 +6649,7 @@
               </a:defRPr>
             </a:pPr>
             <a:r>
-              <a:t>yo estoy</a:t>
+              <a:t>yo voy</a:t>
             </a:r>
           </a:p>
         </p:txBody>
@@ -4094,7 +6685,7 @@
               </a:defRPr>
             </a:pPr>
             <a:r>
-              <a:t>ich bin</a:t>
+              <a:t>ich gehe</a:t>
             </a:r>
           </a:p>
         </p:txBody>
@@ -4130,7 +6721,7 @@
               </a:defRPr>
             </a:pPr>
             <a:r>
-              <a:t>Estoy en el parque.</a:t>
+              <a:t>tú vas</a:t>
             </a:r>
           </a:p>
         </p:txBody>
@@ -4166,14 +6757,86 @@
               </a:defRPr>
             </a:pPr>
             <a:r>
-              <a:t>Ich bin im Park.</a:t>
-            </a:r>
-          </a:p>
-        </p:txBody>
-      </p:sp>
-      <p:sp>
-        <p:nvSpPr>
-          <p:cNvPr id="12" name="Rectangle 11"/>
+              <a:t>du gehst</a:t>
+            </a:r>
+          </a:p>
+        </p:txBody>
+      </p:sp>
+      <p:sp>
+        <p:nvSpPr>
+          <p:cNvPr id="12" name="TextBox 11"/>
+          <p:cNvSpPr txBox="1"/>
+          <p:nvPr/>
+        </p:nvSpPr>
+        <p:spPr>
+          <a:xfrm>
+            <a:off x="640080" y="3657600"/>
+            <a:ext cx="5029200" cy="731520"/>
+          </a:xfrm>
+          <a:prstGeom prst="rect">
+            <a:avLst/>
+          </a:prstGeom>
+          <a:noFill/>
+        </p:spPr>
+        <p:txBody>
+          <a:bodyPr wrap="none">
+            <a:spAutoFit/>
+          </a:bodyPr>
+          <a:lstStyle/>
+          <a:p>
+            <a:pPr algn="l">
+              <a:defRPr sz="2800" b="1">
+                <a:solidFill>
+                  <a:srgbClr val="C41E3A"/>
+                </a:solidFill>
+                <a:latin typeface="Arial"/>
+              </a:defRPr>
+            </a:pPr>
+            <a:r>
+              <a:t>él/ella va</a:t>
+            </a:r>
+          </a:p>
+        </p:txBody>
+      </p:sp>
+      <p:sp>
+        <p:nvSpPr>
+          <p:cNvPr id="13" name="TextBox 12"/>
+          <p:cNvSpPr txBox="1"/>
+          <p:nvPr/>
+        </p:nvSpPr>
+        <p:spPr>
+          <a:xfrm>
+            <a:off x="5943600" y="3749039"/>
+            <a:ext cx="5486400" cy="548640"/>
+          </a:xfrm>
+          <a:prstGeom prst="rect">
+            <a:avLst/>
+          </a:prstGeom>
+          <a:noFill/>
+        </p:spPr>
+        <p:txBody>
+          <a:bodyPr wrap="none">
+            <a:spAutoFit/>
+          </a:bodyPr>
+          <a:lstStyle/>
+          <a:p>
+            <a:pPr algn="l">
+              <a:defRPr sz="1800" b="0">
+                <a:solidFill>
+                  <a:srgbClr val="555555"/>
+                </a:solidFill>
+                <a:latin typeface="Arial"/>
+              </a:defRPr>
+            </a:pPr>
+            <a:r>
+              <a:t>er/sie geht</a:t>
+            </a:r>
+          </a:p>
+        </p:txBody>
+      </p:sp>
+      <p:sp>
+        <p:nvSpPr>
+          <p:cNvPr id="14" name="Rectangle 13"/>
           <p:cNvSpPr/>
           <p:nvPr/>
         </p:nvSpPr>
@@ -4218,7 +6881,7 @@
       </p:sp>
       <p:sp>
         <p:nvSpPr>
-          <p:cNvPr id="13" name="TextBox 12"/>
+          <p:cNvPr id="15" name="TextBox 14"/>
           <p:cNvSpPr txBox="1"/>
           <p:nvPr/>
         </p:nvSpPr>
@@ -4247,7 +6910,7 @@
               </a:defRPr>
             </a:pPr>
             <a:r>
-              <a:t>💡 ir + a(l) / estar + en</a:t>
+              <a:t>💡 Unregelmäßig!</a:t>
             </a:r>
           </a:p>
         </p:txBody>
@@ -4466,44 +7129,37 @@
       </p:sp>
       <p:sp>
         <p:nvSpPr>
-          <p:cNvPr id="7" name="Rectangle 6"/>
-          <p:cNvSpPr/>
+          <p:cNvPr id="7" name="TextBox 6"/>
+          <p:cNvSpPr txBox="1"/>
           <p:nvPr/>
         </p:nvSpPr>
         <p:spPr>
           <a:xfrm>
             <a:off x="457200" y="640080"/>
-            <a:ext cx="1828800" cy="457200"/>
-          </a:xfrm>
-          <a:prstGeom prst="rect">
-            <a:avLst/>
-          </a:prstGeom>
-          <a:solidFill>
-            <a:srgbClr val="C41E3A"/>
-          </a:solidFill>
-          <a:ln>
-            <a:noFill/>
-          </a:ln>
-        </p:spPr>
-        <p:style>
-          <a:lnRef idx="1">
-            <a:schemeClr val="accent1"/>
-          </a:lnRef>
-          <a:fillRef idx="3">
-            <a:schemeClr val="accent1"/>
-          </a:fillRef>
-          <a:effectRef idx="2">
-            <a:schemeClr val="accent1"/>
-          </a:effectRef>
-          <a:fontRef idx="minor">
-            <a:schemeClr val="lt1"/>
-          </a:fontRef>
-        </p:style>
-        <p:txBody>
-          <a:bodyPr rtlCol="0" anchor="ctr"/>
-          <a:lstStyle/>
-          <a:p>
-            <a:pPr algn="ctr"/>
+            <a:ext cx="11274552" cy="731520"/>
+          </a:xfrm>
+          <a:prstGeom prst="rect">
+            <a:avLst/>
+          </a:prstGeom>
+          <a:noFill/>
+        </p:spPr>
+        <p:txBody>
+          <a:bodyPr wrap="none">
+            <a:spAutoFit/>
+          </a:bodyPr>
+          <a:lstStyle/>
+          <a:p>
+            <a:pPr algn="l">
+              <a:defRPr sz="3200" b="1">
+                <a:solidFill>
+                  <a:srgbClr val="C41E3A"/>
+                </a:solidFill>
+                <a:latin typeface="Arial"/>
+              </a:defRPr>
+            </a:pPr>
+            <a:r>
+              <a:t>📝 ir: Plural</a:t>
+            </a:r>
           </a:p>
         </p:txBody>
       </p:sp>
@@ -4515,30 +7171,30 @@
         </p:nvSpPr>
         <p:spPr>
           <a:xfrm>
-            <a:off x="548640" y="713231"/>
-            <a:ext cx="1645920" cy="320040"/>
-          </a:xfrm>
-          <a:prstGeom prst="rect">
-            <a:avLst/>
-          </a:prstGeom>
-          <a:noFill/>
-        </p:spPr>
-        <p:txBody>
-          <a:bodyPr wrap="none">
-            <a:spAutoFit/>
-          </a:bodyPr>
-          <a:lstStyle/>
-          <a:p>
-            <a:pPr algn="ctr">
-              <a:defRPr sz="1400" b="1">
-                <a:solidFill>
-                  <a:srgbClr val="FFFFFF"/>
-                </a:solidFill>
-                <a:latin typeface="Arial"/>
-              </a:defRPr>
-            </a:pPr>
-            <a:r>
-              <a:t>ÜBUNG</a:t>
+            <a:off x="640080" y="1463040"/>
+            <a:ext cx="5029200" cy="731520"/>
+          </a:xfrm>
+          <a:prstGeom prst="rect">
+            <a:avLst/>
+          </a:prstGeom>
+          <a:noFill/>
+        </p:spPr>
+        <p:txBody>
+          <a:bodyPr wrap="none">
+            <a:spAutoFit/>
+          </a:bodyPr>
+          <a:lstStyle/>
+          <a:p>
+            <a:pPr algn="l">
+              <a:defRPr sz="2800" b="1">
+                <a:solidFill>
+                  <a:srgbClr val="C41E3A"/>
+                </a:solidFill>
+                <a:latin typeface="Arial"/>
+              </a:defRPr>
+            </a:pPr>
+            <a:r>
+              <a:t>nosotros vamos</a:t>
             </a:r>
           </a:p>
         </p:txBody>
@@ -4551,22 +7207,58 @@
         </p:nvSpPr>
         <p:spPr>
           <a:xfrm>
-            <a:off x="457200" y="1280160"/>
-            <a:ext cx="11274552" cy="731520"/>
-          </a:xfrm>
-          <a:prstGeom prst="rect">
-            <a:avLst/>
-          </a:prstGeom>
-          <a:noFill/>
-        </p:spPr>
-        <p:txBody>
-          <a:bodyPr wrap="none">
-            <a:spAutoFit/>
-          </a:bodyPr>
-          <a:lstStyle/>
-          <a:p>
-            <a:pPr algn="l">
-              <a:defRPr sz="3200" b="1">
+            <a:off x="5943600" y="1554480"/>
+            <a:ext cx="5486400" cy="548640"/>
+          </a:xfrm>
+          <a:prstGeom prst="rect">
+            <a:avLst/>
+          </a:prstGeom>
+          <a:noFill/>
+        </p:spPr>
+        <p:txBody>
+          <a:bodyPr wrap="none">
+            <a:spAutoFit/>
+          </a:bodyPr>
+          <a:lstStyle/>
+          <a:p>
+            <a:pPr algn="l">
+              <a:defRPr sz="1800" b="0">
+                <a:solidFill>
+                  <a:srgbClr val="555555"/>
+                </a:solidFill>
+                <a:latin typeface="Arial"/>
+              </a:defRPr>
+            </a:pPr>
+            <a:r>
+              <a:t>wir gehen</a:t>
+            </a:r>
+          </a:p>
+        </p:txBody>
+      </p:sp>
+      <p:sp>
+        <p:nvSpPr>
+          <p:cNvPr id="10" name="TextBox 9"/>
+          <p:cNvSpPr txBox="1"/>
+          <p:nvPr/>
+        </p:nvSpPr>
+        <p:spPr>
+          <a:xfrm>
+            <a:off x="640080" y="2560320"/>
+            <a:ext cx="5029200" cy="731520"/>
+          </a:xfrm>
+          <a:prstGeom prst="rect">
+            <a:avLst/>
+          </a:prstGeom>
+          <a:noFill/>
+        </p:spPr>
+        <p:txBody>
+          <a:bodyPr wrap="none">
+            <a:spAutoFit/>
+          </a:bodyPr>
+          <a:lstStyle/>
+          <a:p>
+            <a:pPr algn="l">
+              <a:defRPr sz="2800" b="1">
                 <a:solidFill>
                   <a:srgbClr val="C41E3A"/>
                 </a:solidFill>
@@ -4574,35 +7266,71 @@
               </a:defRPr>
             </a:pPr>
             <a:r>
-              <a:t>✏️ ir oder estar?</a:t>
-            </a:r>
-          </a:p>
-        </p:txBody>
-      </p:sp>
-      <p:sp>
-        <p:nvSpPr>
-          <p:cNvPr id="10" name="TextBox 9"/>
-          <p:cNvSpPr txBox="1"/>
-          <p:nvPr/>
-        </p:nvSpPr>
-        <p:spPr>
-          <a:xfrm>
-            <a:off x="640080" y="2011680"/>
-            <a:ext cx="5029200" cy="548640"/>
-          </a:xfrm>
-          <a:prstGeom prst="rect">
-            <a:avLst/>
-          </a:prstGeom>
-          <a:noFill/>
-        </p:spPr>
-        <p:txBody>
-          <a:bodyPr wrap="none">
-            <a:spAutoFit/>
-          </a:bodyPr>
-          <a:lstStyle/>
-          <a:p>
-            <a:pPr algn="l">
-              <a:defRPr sz="2200" b="1">
+              <a:t>vosotros vais</a:t>
+            </a:r>
+          </a:p>
+        </p:txBody>
+      </p:sp>
+      <p:sp>
+        <p:nvSpPr>
+          <p:cNvPr id="11" name="TextBox 10"/>
+          <p:cNvSpPr txBox="1"/>
+          <p:nvPr/>
+        </p:nvSpPr>
+        <p:spPr>
+          <a:xfrm>
+            <a:off x="5943600" y="2651760"/>
+            <a:ext cx="5486400" cy="548640"/>
+          </a:xfrm>
+          <a:prstGeom prst="rect">
+            <a:avLst/>
+          </a:prstGeom>
+          <a:noFill/>
+        </p:spPr>
+        <p:txBody>
+          <a:bodyPr wrap="none">
+            <a:spAutoFit/>
+          </a:bodyPr>
+          <a:lstStyle/>
+          <a:p>
+            <a:pPr algn="l">
+              <a:defRPr sz="1800" b="0">
+                <a:solidFill>
+                  <a:srgbClr val="555555"/>
+                </a:solidFill>
+                <a:latin typeface="Arial"/>
+              </a:defRPr>
+            </a:pPr>
+            <a:r>
+              <a:t>ihr geht</a:t>
+            </a:r>
+          </a:p>
+        </p:txBody>
+      </p:sp>
+      <p:sp>
+        <p:nvSpPr>
+          <p:cNvPr id="12" name="TextBox 11"/>
+          <p:cNvSpPr txBox="1"/>
+          <p:nvPr/>
+        </p:nvSpPr>
+        <p:spPr>
+          <a:xfrm>
+            <a:off x="640080" y="3657600"/>
+            <a:ext cx="5029200" cy="731520"/>
+          </a:xfrm>
+          <a:prstGeom prst="rect">
+            <a:avLst/>
+          </a:prstGeom>
+          <a:noFill/>
+        </p:spPr>
+        <p:txBody>
+          <a:bodyPr wrap="none">
+            <a:spAutoFit/>
+          </a:bodyPr>
+          <a:lstStyle/>
+          <a:p>
+            <a:pPr algn="l">
+              <a:defRPr sz="2800" b="1">
                 <a:solidFill>
                   <a:srgbClr val="C41E3A"/>
                 </a:solidFill>
@@ -4610,79 +7338,7 @@
               </a:defRPr>
             </a:pPr>
             <a:r>
-              <a:t>___ al supermercado.</a:t>
-            </a:r>
-          </a:p>
-        </p:txBody>
-      </p:sp>
-      <p:sp>
-        <p:nvSpPr>
-          <p:cNvPr id="11" name="TextBox 10"/>
-          <p:cNvSpPr txBox="1"/>
-          <p:nvPr/>
-        </p:nvSpPr>
-        <p:spPr>
-          <a:xfrm>
-            <a:off x="5943600" y="2011680"/>
-            <a:ext cx="5029200" cy="548640"/>
-          </a:xfrm>
-          <a:prstGeom prst="rect">
-            <a:avLst/>
-          </a:prstGeom>
-          <a:noFill/>
-        </p:spPr>
-        <p:txBody>
-          <a:bodyPr wrap="none">
-            <a:spAutoFit/>
-          </a:bodyPr>
-          <a:lstStyle/>
-          <a:p>
-            <a:pPr algn="l">
-              <a:defRPr sz="2200" b="0">
-                <a:solidFill>
-                  <a:srgbClr val="888888"/>
-                </a:solidFill>
-                <a:latin typeface="Arial"/>
-              </a:defRPr>
-            </a:pPr>
-            <a:r>
-              <a:t>(Voy)</a:t>
-            </a:r>
-          </a:p>
-        </p:txBody>
-      </p:sp>
-      <p:sp>
-        <p:nvSpPr>
-          <p:cNvPr id="12" name="TextBox 11"/>
-          <p:cNvSpPr txBox="1"/>
-          <p:nvPr/>
-        </p:nvSpPr>
-        <p:spPr>
-          <a:xfrm>
-            <a:off x="640080" y="2926080"/>
-            <a:ext cx="5029200" cy="548640"/>
-          </a:xfrm>
-          <a:prstGeom prst="rect">
-            <a:avLst/>
-          </a:prstGeom>
-          <a:noFill/>
-        </p:spPr>
-        <p:txBody>
-          <a:bodyPr wrap="none">
-            <a:spAutoFit/>
-          </a:bodyPr>
-          <a:lstStyle/>
-          <a:p>
-            <a:pPr algn="l">
-              <a:defRPr sz="2200" b="1">
-                <a:solidFill>
-                  <a:srgbClr val="C41E3A"/>
-                </a:solidFill>
-                <a:latin typeface="Arial"/>
-              </a:defRPr>
-            </a:pPr>
-            <a:r>
-              <a:t>___ en casa.</a:t>
+              <a:t>ellos van</a:t>
             </a:r>
           </a:p>
         </p:txBody>
@@ -4695,111 +7351,30 @@
         </p:nvSpPr>
         <p:spPr>
           <a:xfrm>
-            <a:off x="5943600" y="2926080"/>
-            <a:ext cx="5029200" cy="548640"/>
-          </a:xfrm>
-          <a:prstGeom prst="rect">
-            <a:avLst/>
-          </a:prstGeom>
-          <a:noFill/>
-        </p:spPr>
-        <p:txBody>
-          <a:bodyPr wrap="none">
-            <a:spAutoFit/>
-          </a:bodyPr>
-          <a:lstStyle/>
-          <a:p>
-            <a:pPr algn="l">
-              <a:defRPr sz="2200" b="0">
-                <a:solidFill>
-                  <a:srgbClr val="888888"/>
-                </a:solidFill>
-                <a:latin typeface="Arial"/>
-              </a:defRPr>
-            </a:pPr>
-            <a:r>
-              <a:t>(Estoy)</a:t>
-            </a:r>
-          </a:p>
-        </p:txBody>
-      </p:sp>
-      <p:sp>
-        <p:nvSpPr>
-          <p:cNvPr id="14" name="Rectangle 13"/>
-          <p:cNvSpPr/>
-          <p:nvPr/>
-        </p:nvSpPr>
-        <p:spPr>
-          <a:xfrm>
-            <a:off x="457200" y="5943600"/>
-            <a:ext cx="11274552" cy="548640"/>
-          </a:xfrm>
-          <a:prstGeom prst="rect">
-            <a:avLst/>
-          </a:prstGeom>
-          <a:solidFill>
-            <a:srgbClr val="FDF2F4"/>
-          </a:solidFill>
-          <a:ln>
-            <a:solidFill>
-              <a:srgbClr val="C41E3A"/>
-            </a:solidFill>
-          </a:ln>
-        </p:spPr>
-        <p:style>
-          <a:lnRef idx="1">
-            <a:schemeClr val="accent1"/>
-          </a:lnRef>
-          <a:fillRef idx="3">
-            <a:schemeClr val="accent1"/>
-          </a:fillRef>
-          <a:effectRef idx="2">
-            <a:schemeClr val="accent1"/>
-          </a:effectRef>
-          <a:fontRef idx="minor">
-            <a:schemeClr val="lt1"/>
-          </a:fontRef>
-        </p:style>
-        <p:txBody>
-          <a:bodyPr rtlCol="0" anchor="ctr"/>
-          <a:lstStyle/>
-          <a:p>
-            <a:pPr algn="ctr"/>
-          </a:p>
-        </p:txBody>
-      </p:sp>
-      <p:sp>
-        <p:nvSpPr>
-          <p:cNvPr id="15" name="TextBox 14"/>
-          <p:cNvSpPr txBox="1"/>
-          <p:nvPr/>
-        </p:nvSpPr>
-        <p:spPr>
-          <a:xfrm>
-            <a:off x="640080" y="6053328"/>
-            <a:ext cx="10972800" cy="365760"/>
-          </a:xfrm>
-          <a:prstGeom prst="rect">
-            <a:avLst/>
-          </a:prstGeom>
-          <a:noFill/>
-        </p:spPr>
-        <p:txBody>
-          <a:bodyPr wrap="none">
-            <a:spAutoFit/>
-          </a:bodyPr>
-          <a:lstStyle/>
-          <a:p>
-            <a:pPr algn="l">
-              <a:defRPr sz="1400" b="1">
-                <a:solidFill>
-                  <a:srgbClr val="C41E3A"/>
-                </a:solidFill>
-                <a:latin typeface="Arial"/>
-              </a:defRPr>
-            </a:pPr>
-            <a:r>
-              <a:t>📝 AB-06b: Aufgabe 2</a:t>
+            <a:off x="5943600" y="3749039"/>
+            <a:ext cx="5486400" cy="548640"/>
+          </a:xfrm>
+          <a:prstGeom prst="rect">
+            <a:avLst/>
+          </a:prstGeom>
+          <a:noFill/>
+        </p:spPr>
+        <p:txBody>
+          <a:bodyPr wrap="none">
+            <a:spAutoFit/>
+          </a:bodyPr>
+          <a:lstStyle/>
+          <a:p>
+            <a:pPr algn="l">
+              <a:defRPr sz="1800" b="0">
+                <a:solidFill>
+                  <a:srgbClr val="555555"/>
+                </a:solidFill>
+                <a:latin typeface="Arial"/>
+              </a:defRPr>
+            </a:pPr>
+            <a:r>
+              <a:t>sie gehen</a:t>
             </a:r>
           </a:p>
         </p:txBody>
@@ -5018,14 +7593,293 @@
       </p:sp>
       <p:sp>
         <p:nvSpPr>
-          <p:cNvPr id="7" name="Rectangle 6"/>
+          <p:cNvPr id="7" name="TextBox 6"/>
+          <p:cNvSpPr txBox="1"/>
+          <p:nvPr/>
+        </p:nvSpPr>
+        <p:spPr>
+          <a:xfrm>
+            <a:off x="457200" y="640080"/>
+            <a:ext cx="11274552" cy="731520"/>
+          </a:xfrm>
+          <a:prstGeom prst="rect">
+            <a:avLst/>
+          </a:prstGeom>
+          <a:noFill/>
+        </p:spPr>
+        <p:txBody>
+          <a:bodyPr wrap="none">
+            <a:spAutoFit/>
+          </a:bodyPr>
+          <a:lstStyle/>
+          <a:p>
+            <a:pPr algn="l">
+              <a:defRPr sz="3200" b="1">
+                <a:solidFill>
+                  <a:srgbClr val="C41E3A"/>
+                </a:solidFill>
+                <a:latin typeface="Arial"/>
+              </a:defRPr>
+            </a:pPr>
+            <a:r>
+              <a:t>📝 ir a + Ort</a:t>
+            </a:r>
+          </a:p>
+        </p:txBody>
+      </p:sp>
+      <p:sp>
+        <p:nvSpPr>
+          <p:cNvPr id="8" name="TextBox 7"/>
+          <p:cNvSpPr txBox="1"/>
+          <p:nvPr/>
+        </p:nvSpPr>
+        <p:spPr>
+          <a:xfrm>
+            <a:off x="640080" y="1463040"/>
+            <a:ext cx="5029200" cy="731520"/>
+          </a:xfrm>
+          <a:prstGeom prst="rect">
+            <a:avLst/>
+          </a:prstGeom>
+          <a:noFill/>
+        </p:spPr>
+        <p:txBody>
+          <a:bodyPr wrap="none">
+            <a:spAutoFit/>
+          </a:bodyPr>
+          <a:lstStyle/>
+          <a:p>
+            <a:pPr algn="l">
+              <a:defRPr sz="2800" b="1">
+                <a:solidFill>
+                  <a:srgbClr val="C41E3A"/>
+                </a:solidFill>
+                <a:latin typeface="Arial"/>
+              </a:defRPr>
+            </a:pPr>
+            <a:r>
+              <a:t>Voy al cine.</a:t>
+            </a:r>
+          </a:p>
+        </p:txBody>
+      </p:sp>
+      <p:sp>
+        <p:nvSpPr>
+          <p:cNvPr id="9" name="TextBox 8"/>
+          <p:cNvSpPr txBox="1"/>
+          <p:nvPr/>
+        </p:nvSpPr>
+        <p:spPr>
+          <a:xfrm>
+            <a:off x="5943600" y="1554480"/>
+            <a:ext cx="5486400" cy="548640"/>
+          </a:xfrm>
+          <a:prstGeom prst="rect">
+            <a:avLst/>
+          </a:prstGeom>
+          <a:noFill/>
+        </p:spPr>
+        <p:txBody>
+          <a:bodyPr wrap="none">
+            <a:spAutoFit/>
+          </a:bodyPr>
+          <a:lstStyle/>
+          <a:p>
+            <a:pPr algn="l">
+              <a:defRPr sz="1800" b="0">
+                <a:solidFill>
+                  <a:srgbClr val="555555"/>
+                </a:solidFill>
+                <a:latin typeface="Arial"/>
+              </a:defRPr>
+            </a:pPr>
+            <a:r>
+              <a:t>Ich gehe ins Kino.</a:t>
+            </a:r>
+          </a:p>
+        </p:txBody>
+      </p:sp>
+      <p:sp>
+        <p:nvSpPr>
+          <p:cNvPr id="10" name="TextBox 9"/>
+          <p:cNvSpPr txBox="1"/>
+          <p:nvPr/>
+        </p:nvSpPr>
+        <p:spPr>
+          <a:xfrm>
+            <a:off x="640080" y="2560320"/>
+            <a:ext cx="5029200" cy="731520"/>
+          </a:xfrm>
+          <a:prstGeom prst="rect">
+            <a:avLst/>
+          </a:prstGeom>
+          <a:noFill/>
+        </p:spPr>
+        <p:txBody>
+          <a:bodyPr wrap="none">
+            <a:spAutoFit/>
+          </a:bodyPr>
+          <a:lstStyle/>
+          <a:p>
+            <a:pPr algn="l">
+              <a:defRPr sz="2800" b="1">
+                <a:solidFill>
+                  <a:srgbClr val="C41E3A"/>
+                </a:solidFill>
+                <a:latin typeface="Arial"/>
+              </a:defRPr>
+            </a:pPr>
+            <a:r>
+              <a:t>Vamos a la playa.</a:t>
+            </a:r>
+          </a:p>
+        </p:txBody>
+      </p:sp>
+      <p:sp>
+        <p:nvSpPr>
+          <p:cNvPr id="11" name="TextBox 10"/>
+          <p:cNvSpPr txBox="1"/>
+          <p:nvPr/>
+        </p:nvSpPr>
+        <p:spPr>
+          <a:xfrm>
+            <a:off x="5943600" y="2651760"/>
+            <a:ext cx="5486400" cy="548640"/>
+          </a:xfrm>
+          <a:prstGeom prst="rect">
+            <a:avLst/>
+          </a:prstGeom>
+          <a:noFill/>
+        </p:spPr>
+        <p:txBody>
+          <a:bodyPr wrap="none">
+            <a:spAutoFit/>
+          </a:bodyPr>
+          <a:lstStyle/>
+          <a:p>
+            <a:pPr algn="l">
+              <a:defRPr sz="1800" b="0">
+                <a:solidFill>
+                  <a:srgbClr val="555555"/>
+                </a:solidFill>
+                <a:latin typeface="Arial"/>
+              </a:defRPr>
+            </a:pPr>
+            <a:r>
+              <a:t>Wir gehen zum Strand.</a:t>
+            </a:r>
+          </a:p>
+        </p:txBody>
+      </p:sp>
+      <p:sp>
+        <p:nvSpPr>
+          <p:cNvPr id="12" name="Rectangle 11"/>
           <p:cNvSpPr/>
           <p:nvPr/>
         </p:nvSpPr>
         <p:spPr>
           <a:xfrm>
-            <a:off x="457200" y="640080"/>
-            <a:ext cx="1828800" cy="457200"/>
+            <a:off x="457200" y="5029200"/>
+            <a:ext cx="11274552" cy="1097280"/>
+          </a:xfrm>
+          <a:prstGeom prst="rect">
+            <a:avLst/>
+          </a:prstGeom>
+          <a:solidFill>
+            <a:srgbClr val="FFF8F0"/>
+          </a:solidFill>
+          <a:ln>
+            <a:solidFill>
+              <a:srgbClr val="B35C00"/>
+            </a:solidFill>
+          </a:ln>
+        </p:spPr>
+        <p:style>
+          <a:lnRef idx="1">
+            <a:schemeClr val="accent1"/>
+          </a:lnRef>
+          <a:fillRef idx="3">
+            <a:schemeClr val="accent1"/>
+          </a:fillRef>
+          <a:effectRef idx="2">
+            <a:schemeClr val="accent1"/>
+          </a:effectRef>
+          <a:fontRef idx="minor">
+            <a:schemeClr val="lt1"/>
+          </a:fontRef>
+        </p:style>
+        <p:txBody>
+          <a:bodyPr rtlCol="0" anchor="ctr"/>
+          <a:lstStyle/>
+          <a:p>
+            <a:pPr algn="ctr"/>
+          </a:p>
+        </p:txBody>
+      </p:sp>
+      <p:sp>
+        <p:nvSpPr>
+          <p:cNvPr id="13" name="TextBox 12"/>
+          <p:cNvSpPr txBox="1"/>
+          <p:nvPr/>
+        </p:nvSpPr>
+        <p:spPr>
+          <a:xfrm>
+            <a:off x="640080" y="5212080"/>
+            <a:ext cx="10972800" cy="731520"/>
+          </a:xfrm>
+          <a:prstGeom prst="rect">
+            <a:avLst/>
+          </a:prstGeom>
+          <a:noFill/>
+        </p:spPr>
+        <p:txBody>
+          <a:bodyPr wrap="none">
+            <a:spAutoFit/>
+          </a:bodyPr>
+          <a:lstStyle/>
+          <a:p>
+            <a:pPr algn="l">
+              <a:defRPr sz="1600" b="0">
+                <a:solidFill>
+                  <a:srgbClr val="222222"/>
+                </a:solidFill>
+                <a:latin typeface="Arial"/>
+              </a:defRPr>
+            </a:pPr>
+            <a:r>
+              <a:t>💡 a + el = al</a:t>
+            </a:r>
+          </a:p>
+        </p:txBody>
+      </p:sp>
+    </p:spTree>
+  </p:cSld>
+  <p:clrMapOvr>
+    <a:masterClrMapping/>
+  </p:clrMapOvr>
+</p:sld>
+</file>
+
+<file path=ppt/slides/slide6.xml><?xml version="1.0" encoding="utf-8"?>
+<p:sld xmlns:a="http://schemas.openxmlformats.org/drawingml/2006/main" xmlns:p="http://schemas.openxmlformats.org/presentationml/2006/main" xmlns:r="http://schemas.openxmlformats.org/officeDocument/2006/relationships">
+  <p:cSld>
+    <p:spTree>
+      <p:nvGrpSpPr>
+        <p:cNvPr id="1" name=""/>
+        <p:cNvGrpSpPr/>
+        <p:nvPr/>
+      </p:nvGrpSpPr>
+      <p:grpSpPr/>
+      <p:sp>
+        <p:nvSpPr>
+          <p:cNvPr id="2" name="Rectangle 1"/>
+          <p:cNvSpPr/>
+          <p:nvPr/>
+        </p:nvSpPr>
+        <p:spPr>
+          <a:xfrm>
+            <a:off x="0" y="0"/>
+            <a:ext cx="12191695" cy="457200"/>
           </a:xfrm>
           <a:prstGeom prst="rect">
             <a:avLst/>
@@ -5061,27 +7915,491 @@
       </p:sp>
       <p:sp>
         <p:nvSpPr>
+          <p:cNvPr id="3" name="TextBox 2"/>
+          <p:cNvSpPr txBox="1"/>
+          <p:nvPr/>
+        </p:nvSpPr>
+        <p:spPr>
+          <a:xfrm>
+            <a:off x="274320" y="91440"/>
+            <a:ext cx="3657600" cy="274320"/>
+          </a:xfrm>
+          <a:prstGeom prst="rect">
+            <a:avLst/>
+          </a:prstGeom>
+          <a:noFill/>
+        </p:spPr>
+        <p:txBody>
+          <a:bodyPr wrap="none">
+            <a:spAutoFit/>
+          </a:bodyPr>
+          <a:lstStyle/>
+          <a:p>
+            <a:pPr algn="l">
+              <a:defRPr sz="1400" b="1">
+                <a:solidFill>
+                  <a:srgbClr val="FFFFFF"/>
+                </a:solidFill>
+                <a:latin typeface="Arial"/>
+              </a:defRPr>
+            </a:pPr>
+            <a:r>
+              <a:t>Spanisch Klasse 7 · LP-06b</a:t>
+            </a:r>
+          </a:p>
+        </p:txBody>
+      </p:sp>
+      <p:sp>
+        <p:nvSpPr>
+          <p:cNvPr id="4" name="Rectangle 3"/>
+          <p:cNvSpPr/>
+          <p:nvPr/>
+        </p:nvSpPr>
+        <p:spPr>
+          <a:xfrm>
+            <a:off x="0" y="6583680"/>
+            <a:ext cx="12191695" cy="274320"/>
+          </a:xfrm>
+          <a:prstGeom prst="rect">
+            <a:avLst/>
+          </a:prstGeom>
+          <a:solidFill>
+            <a:srgbClr val="F5F5F5"/>
+          </a:solidFill>
+          <a:ln>
+            <a:noFill/>
+          </a:ln>
+        </p:spPr>
+        <p:style>
+          <a:lnRef idx="1">
+            <a:schemeClr val="accent1"/>
+          </a:lnRef>
+          <a:fillRef idx="3">
+            <a:schemeClr val="accent1"/>
+          </a:fillRef>
+          <a:effectRef idx="2">
+            <a:schemeClr val="accent1"/>
+          </a:effectRef>
+          <a:fontRef idx="minor">
+            <a:schemeClr val="lt1"/>
+          </a:fontRef>
+        </p:style>
+        <p:txBody>
+          <a:bodyPr rtlCol="0" anchor="ctr"/>
+          <a:lstStyle/>
+          <a:p>
+            <a:pPr algn="ctr"/>
+          </a:p>
+        </p:txBody>
+      </p:sp>
+      <p:sp>
+        <p:nvSpPr>
+          <p:cNvPr id="5" name="TextBox 4"/>
+          <p:cNvSpPr txBox="1"/>
+          <p:nvPr/>
+        </p:nvSpPr>
+        <p:spPr>
+          <a:xfrm>
+            <a:off x="274320" y="6601968"/>
+            <a:ext cx="4572000" cy="228600"/>
+          </a:xfrm>
+          <a:prstGeom prst="rect">
+            <a:avLst/>
+          </a:prstGeom>
+          <a:noFill/>
+        </p:spPr>
+        <p:txBody>
+          <a:bodyPr wrap="none">
+            <a:spAutoFit/>
+          </a:bodyPr>
+          <a:lstStyle/>
+          <a:p>
+            <a:pPr algn="l">
+              <a:defRPr sz="1000" b="0">
+                <a:solidFill>
+                  <a:srgbClr val="555555"/>
+                </a:solidFill>
+                <a:latin typeface="Arial"/>
+              </a:defRPr>
+            </a:pPr>
+            <a:r>
+              <a:t>Ir y estar</a:t>
+            </a:r>
+          </a:p>
+        </p:txBody>
+      </p:sp>
+      <p:sp>
+        <p:nvSpPr>
+          <p:cNvPr id="6" name="TextBox 5"/>
+          <p:cNvSpPr txBox="1"/>
+          <p:nvPr/>
+        </p:nvSpPr>
+        <p:spPr>
+          <a:xfrm>
+            <a:off x="9144000" y="6601968"/>
+            <a:ext cx="2743200" cy="228600"/>
+          </a:xfrm>
+          <a:prstGeom prst="rect">
+            <a:avLst/>
+          </a:prstGeom>
+          <a:noFill/>
+        </p:spPr>
+        <p:txBody>
+          <a:bodyPr wrap="none">
+            <a:spAutoFit/>
+          </a:bodyPr>
+          <a:lstStyle/>
+          <a:p>
+            <a:pPr algn="r">
+              <a:defRPr sz="1000" b="0">
+                <a:solidFill>
+                  <a:srgbClr val="555555"/>
+                </a:solidFill>
+                <a:latin typeface="Arial"/>
+              </a:defRPr>
+            </a:pPr>
+            <a:r>
+              <a:t>Sequenz 6</a:t>
+            </a:r>
+          </a:p>
+        </p:txBody>
+      </p:sp>
+      <p:sp>
+        <p:nvSpPr>
+          <p:cNvPr id="7" name="TextBox 6"/>
+          <p:cNvSpPr txBox="1"/>
+          <p:nvPr/>
+        </p:nvSpPr>
+        <p:spPr>
+          <a:xfrm>
+            <a:off x="457200" y="640080"/>
+            <a:ext cx="11274552" cy="731520"/>
+          </a:xfrm>
+          <a:prstGeom prst="rect">
+            <a:avLst/>
+          </a:prstGeom>
+          <a:noFill/>
+        </p:spPr>
+        <p:txBody>
+          <a:bodyPr wrap="none">
+            <a:spAutoFit/>
+          </a:bodyPr>
+          <a:lstStyle/>
+          <a:p>
+            <a:pPr algn="l">
+              <a:defRPr sz="3200" b="1">
+                <a:solidFill>
+                  <a:srgbClr val="C41E3A"/>
+                </a:solidFill>
+                <a:latin typeface="Arial"/>
+              </a:defRPr>
+            </a:pPr>
+            <a:r>
+              <a:t>📝 estar (sich befinden)</a:t>
+            </a:r>
+          </a:p>
+        </p:txBody>
+      </p:sp>
+      <p:sp>
+        <p:nvSpPr>
           <p:cNvPr id="8" name="TextBox 7"/>
           <p:cNvSpPr txBox="1"/>
           <p:nvPr/>
         </p:nvSpPr>
         <p:spPr>
           <a:xfrm>
-            <a:off x="548640" y="713231"/>
-            <a:ext cx="1645920" cy="320040"/>
-          </a:xfrm>
-          <a:prstGeom prst="rect">
-            <a:avLst/>
-          </a:prstGeom>
-          <a:noFill/>
-        </p:spPr>
-        <p:txBody>
-          <a:bodyPr wrap="none">
-            <a:spAutoFit/>
-          </a:bodyPr>
-          <a:lstStyle/>
-          <a:p>
-            <a:pPr algn="ctr">
+            <a:off x="640080" y="1463040"/>
+            <a:ext cx="5029200" cy="731520"/>
+          </a:xfrm>
+          <a:prstGeom prst="rect">
+            <a:avLst/>
+          </a:prstGeom>
+          <a:noFill/>
+        </p:spPr>
+        <p:txBody>
+          <a:bodyPr wrap="none">
+            <a:spAutoFit/>
+          </a:bodyPr>
+          <a:lstStyle/>
+          <a:p>
+            <a:pPr algn="l">
+              <a:defRPr sz="2800" b="1">
+                <a:solidFill>
+                  <a:srgbClr val="C41E3A"/>
+                </a:solidFill>
+                <a:latin typeface="Arial"/>
+              </a:defRPr>
+            </a:pPr>
+            <a:r>
+              <a:t>yo estoy</a:t>
+            </a:r>
+          </a:p>
+        </p:txBody>
+      </p:sp>
+      <p:sp>
+        <p:nvSpPr>
+          <p:cNvPr id="9" name="TextBox 8"/>
+          <p:cNvSpPr txBox="1"/>
+          <p:nvPr/>
+        </p:nvSpPr>
+        <p:spPr>
+          <a:xfrm>
+            <a:off x="5943600" y="1554480"/>
+            <a:ext cx="5486400" cy="548640"/>
+          </a:xfrm>
+          <a:prstGeom prst="rect">
+            <a:avLst/>
+          </a:prstGeom>
+          <a:noFill/>
+        </p:spPr>
+        <p:txBody>
+          <a:bodyPr wrap="none">
+            <a:spAutoFit/>
+          </a:bodyPr>
+          <a:lstStyle/>
+          <a:p>
+            <a:pPr algn="l">
+              <a:defRPr sz="1800" b="0">
+                <a:solidFill>
+                  <a:srgbClr val="555555"/>
+                </a:solidFill>
+                <a:latin typeface="Arial"/>
+              </a:defRPr>
+            </a:pPr>
+            <a:r>
+              <a:t>ich bin</a:t>
+            </a:r>
+          </a:p>
+        </p:txBody>
+      </p:sp>
+      <p:sp>
+        <p:nvSpPr>
+          <p:cNvPr id="10" name="TextBox 9"/>
+          <p:cNvSpPr txBox="1"/>
+          <p:nvPr/>
+        </p:nvSpPr>
+        <p:spPr>
+          <a:xfrm>
+            <a:off x="640080" y="2560320"/>
+            <a:ext cx="5029200" cy="731520"/>
+          </a:xfrm>
+          <a:prstGeom prst="rect">
+            <a:avLst/>
+          </a:prstGeom>
+          <a:noFill/>
+        </p:spPr>
+        <p:txBody>
+          <a:bodyPr wrap="none">
+            <a:spAutoFit/>
+          </a:bodyPr>
+          <a:lstStyle/>
+          <a:p>
+            <a:pPr algn="l">
+              <a:defRPr sz="2800" b="1">
+                <a:solidFill>
+                  <a:srgbClr val="C41E3A"/>
+                </a:solidFill>
+                <a:latin typeface="Arial"/>
+              </a:defRPr>
+            </a:pPr>
+            <a:r>
+              <a:t>tú estás</a:t>
+            </a:r>
+          </a:p>
+        </p:txBody>
+      </p:sp>
+      <p:sp>
+        <p:nvSpPr>
+          <p:cNvPr id="11" name="TextBox 10"/>
+          <p:cNvSpPr txBox="1"/>
+          <p:nvPr/>
+        </p:nvSpPr>
+        <p:spPr>
+          <a:xfrm>
+            <a:off x="5943600" y="2651760"/>
+            <a:ext cx="5486400" cy="548640"/>
+          </a:xfrm>
+          <a:prstGeom prst="rect">
+            <a:avLst/>
+          </a:prstGeom>
+          <a:noFill/>
+        </p:spPr>
+        <p:txBody>
+          <a:bodyPr wrap="none">
+            <a:spAutoFit/>
+          </a:bodyPr>
+          <a:lstStyle/>
+          <a:p>
+            <a:pPr algn="l">
+              <a:defRPr sz="1800" b="0">
+                <a:solidFill>
+                  <a:srgbClr val="555555"/>
+                </a:solidFill>
+                <a:latin typeface="Arial"/>
+              </a:defRPr>
+            </a:pPr>
+            <a:r>
+              <a:t>du bist</a:t>
+            </a:r>
+          </a:p>
+        </p:txBody>
+      </p:sp>
+      <p:sp>
+        <p:nvSpPr>
+          <p:cNvPr id="12" name="TextBox 11"/>
+          <p:cNvSpPr txBox="1"/>
+          <p:nvPr/>
+        </p:nvSpPr>
+        <p:spPr>
+          <a:xfrm>
+            <a:off x="640080" y="3657600"/>
+            <a:ext cx="5029200" cy="731520"/>
+          </a:xfrm>
+          <a:prstGeom prst="rect">
+            <a:avLst/>
+          </a:prstGeom>
+          <a:noFill/>
+        </p:spPr>
+        <p:txBody>
+          <a:bodyPr wrap="none">
+            <a:spAutoFit/>
+          </a:bodyPr>
+          <a:lstStyle/>
+          <a:p>
+            <a:pPr algn="l">
+              <a:defRPr sz="2800" b="1">
+                <a:solidFill>
+                  <a:srgbClr val="C41E3A"/>
+                </a:solidFill>
+                <a:latin typeface="Arial"/>
+              </a:defRPr>
+            </a:pPr>
+            <a:r>
+              <a:t>él/ella está</a:t>
+            </a:r>
+          </a:p>
+        </p:txBody>
+      </p:sp>
+      <p:sp>
+        <p:nvSpPr>
+          <p:cNvPr id="13" name="TextBox 12"/>
+          <p:cNvSpPr txBox="1"/>
+          <p:nvPr/>
+        </p:nvSpPr>
+        <p:spPr>
+          <a:xfrm>
+            <a:off x="5943600" y="3749039"/>
+            <a:ext cx="5486400" cy="548640"/>
+          </a:xfrm>
+          <a:prstGeom prst="rect">
+            <a:avLst/>
+          </a:prstGeom>
+          <a:noFill/>
+        </p:spPr>
+        <p:txBody>
+          <a:bodyPr wrap="none">
+            <a:spAutoFit/>
+          </a:bodyPr>
+          <a:lstStyle/>
+          <a:p>
+            <a:pPr algn="l">
+              <a:defRPr sz="1800" b="0">
+                <a:solidFill>
+                  <a:srgbClr val="555555"/>
+                </a:solidFill>
+                <a:latin typeface="Arial"/>
+              </a:defRPr>
+            </a:pPr>
+            <a:r>
+              <a:t>er/sie ist</a:t>
+            </a:r>
+          </a:p>
+        </p:txBody>
+      </p:sp>
+    </p:spTree>
+  </p:cSld>
+  <p:clrMapOvr>
+    <a:masterClrMapping/>
+  </p:clrMapOvr>
+</p:sld>
+</file>
+
+<file path=ppt/slides/slide7.xml><?xml version="1.0" encoding="utf-8"?>
+<p:sld xmlns:a="http://schemas.openxmlformats.org/drawingml/2006/main" xmlns:p="http://schemas.openxmlformats.org/presentationml/2006/main" xmlns:r="http://schemas.openxmlformats.org/officeDocument/2006/relationships">
+  <p:cSld>
+    <p:spTree>
+      <p:nvGrpSpPr>
+        <p:cNvPr id="1" name=""/>
+        <p:cNvGrpSpPr/>
+        <p:nvPr/>
+      </p:nvGrpSpPr>
+      <p:grpSpPr/>
+      <p:sp>
+        <p:nvSpPr>
+          <p:cNvPr id="2" name="Rectangle 1"/>
+          <p:cNvSpPr/>
+          <p:nvPr/>
+        </p:nvSpPr>
+        <p:spPr>
+          <a:xfrm>
+            <a:off x="0" y="0"/>
+            <a:ext cx="12191695" cy="457200"/>
+          </a:xfrm>
+          <a:prstGeom prst="rect">
+            <a:avLst/>
+          </a:prstGeom>
+          <a:solidFill>
+            <a:srgbClr val="C41E3A"/>
+          </a:solidFill>
+          <a:ln>
+            <a:noFill/>
+          </a:ln>
+        </p:spPr>
+        <p:style>
+          <a:lnRef idx="1">
+            <a:schemeClr val="accent1"/>
+          </a:lnRef>
+          <a:fillRef idx="3">
+            <a:schemeClr val="accent1"/>
+          </a:fillRef>
+          <a:effectRef idx="2">
+            <a:schemeClr val="accent1"/>
+          </a:effectRef>
+          <a:fontRef idx="minor">
+            <a:schemeClr val="lt1"/>
+          </a:fontRef>
+        </p:style>
+        <p:txBody>
+          <a:bodyPr rtlCol="0" anchor="ctr"/>
+          <a:lstStyle/>
+          <a:p>
+            <a:pPr algn="ctr"/>
+          </a:p>
+        </p:txBody>
+      </p:sp>
+      <p:sp>
+        <p:nvSpPr>
+          <p:cNvPr id="3" name="TextBox 2"/>
+          <p:cNvSpPr txBox="1"/>
+          <p:nvPr/>
+        </p:nvSpPr>
+        <p:spPr>
+          <a:xfrm>
+            <a:off x="274320" y="91440"/>
+            <a:ext cx="3657600" cy="274320"/>
+          </a:xfrm>
+          <a:prstGeom prst="rect">
+            <a:avLst/>
+          </a:prstGeom>
+          <a:noFill/>
+        </p:spPr>
+        <p:txBody>
+          <a:bodyPr wrap="none">
+            <a:spAutoFit/>
+          </a:bodyPr>
+          <a:lstStyle/>
+          <a:p>
+            <a:pPr algn="l">
               <a:defRPr sz="1400" b="1">
                 <a:solidFill>
                   <a:srgbClr val="FFFFFF"/>
@@ -5090,7 +8408,194 @@
               </a:defRPr>
             </a:pPr>
             <a:r>
-              <a:t>HAUSAUFGABE</a:t>
+              <a:t>Spanisch Klasse 7 · LP-06b</a:t>
+            </a:r>
+          </a:p>
+        </p:txBody>
+      </p:sp>
+      <p:sp>
+        <p:nvSpPr>
+          <p:cNvPr id="4" name="Rectangle 3"/>
+          <p:cNvSpPr/>
+          <p:nvPr/>
+        </p:nvSpPr>
+        <p:spPr>
+          <a:xfrm>
+            <a:off x="0" y="6583680"/>
+            <a:ext cx="12191695" cy="274320"/>
+          </a:xfrm>
+          <a:prstGeom prst="rect">
+            <a:avLst/>
+          </a:prstGeom>
+          <a:solidFill>
+            <a:srgbClr val="F5F5F5"/>
+          </a:solidFill>
+          <a:ln>
+            <a:noFill/>
+          </a:ln>
+        </p:spPr>
+        <p:style>
+          <a:lnRef idx="1">
+            <a:schemeClr val="accent1"/>
+          </a:lnRef>
+          <a:fillRef idx="3">
+            <a:schemeClr val="accent1"/>
+          </a:fillRef>
+          <a:effectRef idx="2">
+            <a:schemeClr val="accent1"/>
+          </a:effectRef>
+          <a:fontRef idx="minor">
+            <a:schemeClr val="lt1"/>
+          </a:fontRef>
+        </p:style>
+        <p:txBody>
+          <a:bodyPr rtlCol="0" anchor="ctr"/>
+          <a:lstStyle/>
+          <a:p>
+            <a:pPr algn="ctr"/>
+          </a:p>
+        </p:txBody>
+      </p:sp>
+      <p:sp>
+        <p:nvSpPr>
+          <p:cNvPr id="5" name="TextBox 4"/>
+          <p:cNvSpPr txBox="1"/>
+          <p:nvPr/>
+        </p:nvSpPr>
+        <p:spPr>
+          <a:xfrm>
+            <a:off x="274320" y="6601968"/>
+            <a:ext cx="4572000" cy="228600"/>
+          </a:xfrm>
+          <a:prstGeom prst="rect">
+            <a:avLst/>
+          </a:prstGeom>
+          <a:noFill/>
+        </p:spPr>
+        <p:txBody>
+          <a:bodyPr wrap="none">
+            <a:spAutoFit/>
+          </a:bodyPr>
+          <a:lstStyle/>
+          <a:p>
+            <a:pPr algn="l">
+              <a:defRPr sz="1000" b="0">
+                <a:solidFill>
+                  <a:srgbClr val="555555"/>
+                </a:solidFill>
+                <a:latin typeface="Arial"/>
+              </a:defRPr>
+            </a:pPr>
+            <a:r>
+              <a:t>Ir y estar</a:t>
+            </a:r>
+          </a:p>
+        </p:txBody>
+      </p:sp>
+      <p:sp>
+        <p:nvSpPr>
+          <p:cNvPr id="6" name="TextBox 5"/>
+          <p:cNvSpPr txBox="1"/>
+          <p:nvPr/>
+        </p:nvSpPr>
+        <p:spPr>
+          <a:xfrm>
+            <a:off x="9144000" y="6601968"/>
+            <a:ext cx="2743200" cy="228600"/>
+          </a:xfrm>
+          <a:prstGeom prst="rect">
+            <a:avLst/>
+          </a:prstGeom>
+          <a:noFill/>
+        </p:spPr>
+        <p:txBody>
+          <a:bodyPr wrap="none">
+            <a:spAutoFit/>
+          </a:bodyPr>
+          <a:lstStyle/>
+          <a:p>
+            <a:pPr algn="r">
+              <a:defRPr sz="1000" b="0">
+                <a:solidFill>
+                  <a:srgbClr val="555555"/>
+                </a:solidFill>
+                <a:latin typeface="Arial"/>
+              </a:defRPr>
+            </a:pPr>
+            <a:r>
+              <a:t>Sequenz 6</a:t>
+            </a:r>
+          </a:p>
+        </p:txBody>
+      </p:sp>
+      <p:sp>
+        <p:nvSpPr>
+          <p:cNvPr id="7" name="TextBox 6"/>
+          <p:cNvSpPr txBox="1"/>
+          <p:nvPr/>
+        </p:nvSpPr>
+        <p:spPr>
+          <a:xfrm>
+            <a:off x="457200" y="640080"/>
+            <a:ext cx="11274552" cy="731520"/>
+          </a:xfrm>
+          <a:prstGeom prst="rect">
+            <a:avLst/>
+          </a:prstGeom>
+          <a:noFill/>
+        </p:spPr>
+        <p:txBody>
+          <a:bodyPr wrap="none">
+            <a:spAutoFit/>
+          </a:bodyPr>
+          <a:lstStyle/>
+          <a:p>
+            <a:pPr algn="l">
+              <a:defRPr sz="3200" b="1">
+                <a:solidFill>
+                  <a:srgbClr val="C41E3A"/>
+                </a:solidFill>
+                <a:latin typeface="Arial"/>
+              </a:defRPr>
+            </a:pPr>
+            <a:r>
+              <a:t>📝 estar: Plural</a:t>
+            </a:r>
+          </a:p>
+        </p:txBody>
+      </p:sp>
+      <p:sp>
+        <p:nvSpPr>
+          <p:cNvPr id="8" name="TextBox 7"/>
+          <p:cNvSpPr txBox="1"/>
+          <p:nvPr/>
+        </p:nvSpPr>
+        <p:spPr>
+          <a:xfrm>
+            <a:off x="640080" y="1463040"/>
+            <a:ext cx="5029200" cy="731520"/>
+          </a:xfrm>
+          <a:prstGeom prst="rect">
+            <a:avLst/>
+          </a:prstGeom>
+          <a:noFill/>
+        </p:spPr>
+        <p:txBody>
+          <a:bodyPr wrap="none">
+            <a:spAutoFit/>
+          </a:bodyPr>
+          <a:lstStyle/>
+          <a:p>
+            <a:pPr algn="l">
+              <a:defRPr sz="2800" b="1">
+                <a:solidFill>
+                  <a:srgbClr val="C41E3A"/>
+                </a:solidFill>
+                <a:latin typeface="Arial"/>
+              </a:defRPr>
+            </a:pPr>
+            <a:r>
+              <a:t>nosotros estamos</a:t>
             </a:r>
           </a:p>
         </p:txBody>
@@ -5103,7 +8608,399 @@
         </p:nvSpPr>
         <p:spPr>
           <a:xfrm>
-            <a:off x="457200" y="1280160"/>
+            <a:off x="5943600" y="1554480"/>
+            <a:ext cx="5486400" cy="548640"/>
+          </a:xfrm>
+          <a:prstGeom prst="rect">
+            <a:avLst/>
+          </a:prstGeom>
+          <a:noFill/>
+        </p:spPr>
+        <p:txBody>
+          <a:bodyPr wrap="none">
+            <a:spAutoFit/>
+          </a:bodyPr>
+          <a:lstStyle/>
+          <a:p>
+            <a:pPr algn="l">
+              <a:defRPr sz="1800" b="0">
+                <a:solidFill>
+                  <a:srgbClr val="555555"/>
+                </a:solidFill>
+                <a:latin typeface="Arial"/>
+              </a:defRPr>
+            </a:pPr>
+            <a:r>
+              <a:t>wir sind</a:t>
+            </a:r>
+          </a:p>
+        </p:txBody>
+      </p:sp>
+      <p:sp>
+        <p:nvSpPr>
+          <p:cNvPr id="10" name="TextBox 9"/>
+          <p:cNvSpPr txBox="1"/>
+          <p:nvPr/>
+        </p:nvSpPr>
+        <p:spPr>
+          <a:xfrm>
+            <a:off x="640080" y="2560320"/>
+            <a:ext cx="5029200" cy="731520"/>
+          </a:xfrm>
+          <a:prstGeom prst="rect">
+            <a:avLst/>
+          </a:prstGeom>
+          <a:noFill/>
+        </p:spPr>
+        <p:txBody>
+          <a:bodyPr wrap="none">
+            <a:spAutoFit/>
+          </a:bodyPr>
+          <a:lstStyle/>
+          <a:p>
+            <a:pPr algn="l">
+              <a:defRPr sz="2800" b="1">
+                <a:solidFill>
+                  <a:srgbClr val="C41E3A"/>
+                </a:solidFill>
+                <a:latin typeface="Arial"/>
+              </a:defRPr>
+            </a:pPr>
+            <a:r>
+              <a:t>vosotros estáis</a:t>
+            </a:r>
+          </a:p>
+        </p:txBody>
+      </p:sp>
+      <p:sp>
+        <p:nvSpPr>
+          <p:cNvPr id="11" name="TextBox 10"/>
+          <p:cNvSpPr txBox="1"/>
+          <p:nvPr/>
+        </p:nvSpPr>
+        <p:spPr>
+          <a:xfrm>
+            <a:off x="5943600" y="2651760"/>
+            <a:ext cx="5486400" cy="548640"/>
+          </a:xfrm>
+          <a:prstGeom prst="rect">
+            <a:avLst/>
+          </a:prstGeom>
+          <a:noFill/>
+        </p:spPr>
+        <p:txBody>
+          <a:bodyPr wrap="none">
+            <a:spAutoFit/>
+          </a:bodyPr>
+          <a:lstStyle/>
+          <a:p>
+            <a:pPr algn="l">
+              <a:defRPr sz="1800" b="0">
+                <a:solidFill>
+                  <a:srgbClr val="555555"/>
+                </a:solidFill>
+                <a:latin typeface="Arial"/>
+              </a:defRPr>
+            </a:pPr>
+            <a:r>
+              <a:t>ihr seid</a:t>
+            </a:r>
+          </a:p>
+        </p:txBody>
+      </p:sp>
+      <p:sp>
+        <p:nvSpPr>
+          <p:cNvPr id="12" name="TextBox 11"/>
+          <p:cNvSpPr txBox="1"/>
+          <p:nvPr/>
+        </p:nvSpPr>
+        <p:spPr>
+          <a:xfrm>
+            <a:off x="640080" y="3657600"/>
+            <a:ext cx="5029200" cy="731520"/>
+          </a:xfrm>
+          <a:prstGeom prst="rect">
+            <a:avLst/>
+          </a:prstGeom>
+          <a:noFill/>
+        </p:spPr>
+        <p:txBody>
+          <a:bodyPr wrap="none">
+            <a:spAutoFit/>
+          </a:bodyPr>
+          <a:lstStyle/>
+          <a:p>
+            <a:pPr algn="l">
+              <a:defRPr sz="2800" b="1">
+                <a:solidFill>
+                  <a:srgbClr val="C41E3A"/>
+                </a:solidFill>
+                <a:latin typeface="Arial"/>
+              </a:defRPr>
+            </a:pPr>
+            <a:r>
+              <a:t>ellos están</a:t>
+            </a:r>
+          </a:p>
+        </p:txBody>
+      </p:sp>
+      <p:sp>
+        <p:nvSpPr>
+          <p:cNvPr id="13" name="TextBox 12"/>
+          <p:cNvSpPr txBox="1"/>
+          <p:nvPr/>
+        </p:nvSpPr>
+        <p:spPr>
+          <a:xfrm>
+            <a:off x="5943600" y="3749039"/>
+            <a:ext cx="5486400" cy="548640"/>
+          </a:xfrm>
+          <a:prstGeom prst="rect">
+            <a:avLst/>
+          </a:prstGeom>
+          <a:noFill/>
+        </p:spPr>
+        <p:txBody>
+          <a:bodyPr wrap="none">
+            <a:spAutoFit/>
+          </a:bodyPr>
+          <a:lstStyle/>
+          <a:p>
+            <a:pPr algn="l">
+              <a:defRPr sz="1800" b="0">
+                <a:solidFill>
+                  <a:srgbClr val="555555"/>
+                </a:solidFill>
+                <a:latin typeface="Arial"/>
+              </a:defRPr>
+            </a:pPr>
+            <a:r>
+              <a:t>sie sind</a:t>
+            </a:r>
+          </a:p>
+        </p:txBody>
+      </p:sp>
+    </p:spTree>
+  </p:cSld>
+  <p:clrMapOvr>
+    <a:masterClrMapping/>
+  </p:clrMapOvr>
+</p:sld>
+</file>
+
+<file path=ppt/slides/slide8.xml><?xml version="1.0" encoding="utf-8"?>
+<p:sld xmlns:a="http://schemas.openxmlformats.org/drawingml/2006/main" xmlns:p="http://schemas.openxmlformats.org/presentationml/2006/main" xmlns:r="http://schemas.openxmlformats.org/officeDocument/2006/relationships">
+  <p:cSld>
+    <p:spTree>
+      <p:nvGrpSpPr>
+        <p:cNvPr id="1" name=""/>
+        <p:cNvGrpSpPr/>
+        <p:nvPr/>
+      </p:nvGrpSpPr>
+      <p:grpSpPr/>
+      <p:sp>
+        <p:nvSpPr>
+          <p:cNvPr id="2" name="Rectangle 1"/>
+          <p:cNvSpPr/>
+          <p:nvPr/>
+        </p:nvSpPr>
+        <p:spPr>
+          <a:xfrm>
+            <a:off x="0" y="0"/>
+            <a:ext cx="12191695" cy="457200"/>
+          </a:xfrm>
+          <a:prstGeom prst="rect">
+            <a:avLst/>
+          </a:prstGeom>
+          <a:solidFill>
+            <a:srgbClr val="C41E3A"/>
+          </a:solidFill>
+          <a:ln>
+            <a:noFill/>
+          </a:ln>
+        </p:spPr>
+        <p:style>
+          <a:lnRef idx="1">
+            <a:schemeClr val="accent1"/>
+          </a:lnRef>
+          <a:fillRef idx="3">
+            <a:schemeClr val="accent1"/>
+          </a:fillRef>
+          <a:effectRef idx="2">
+            <a:schemeClr val="accent1"/>
+          </a:effectRef>
+          <a:fontRef idx="minor">
+            <a:schemeClr val="lt1"/>
+          </a:fontRef>
+        </p:style>
+        <p:txBody>
+          <a:bodyPr rtlCol="0" anchor="ctr"/>
+          <a:lstStyle/>
+          <a:p>
+            <a:pPr algn="ctr"/>
+          </a:p>
+        </p:txBody>
+      </p:sp>
+      <p:sp>
+        <p:nvSpPr>
+          <p:cNvPr id="3" name="TextBox 2"/>
+          <p:cNvSpPr txBox="1"/>
+          <p:nvPr/>
+        </p:nvSpPr>
+        <p:spPr>
+          <a:xfrm>
+            <a:off x="274320" y="91440"/>
+            <a:ext cx="3657600" cy="274320"/>
+          </a:xfrm>
+          <a:prstGeom prst="rect">
+            <a:avLst/>
+          </a:prstGeom>
+          <a:noFill/>
+        </p:spPr>
+        <p:txBody>
+          <a:bodyPr wrap="none">
+            <a:spAutoFit/>
+          </a:bodyPr>
+          <a:lstStyle/>
+          <a:p>
+            <a:pPr algn="l">
+              <a:defRPr sz="1400" b="1">
+                <a:solidFill>
+                  <a:srgbClr val="FFFFFF"/>
+                </a:solidFill>
+                <a:latin typeface="Arial"/>
+              </a:defRPr>
+            </a:pPr>
+            <a:r>
+              <a:t>Spanisch Klasse 7 · LP-06b</a:t>
+            </a:r>
+          </a:p>
+        </p:txBody>
+      </p:sp>
+      <p:sp>
+        <p:nvSpPr>
+          <p:cNvPr id="4" name="Rectangle 3"/>
+          <p:cNvSpPr/>
+          <p:nvPr/>
+        </p:nvSpPr>
+        <p:spPr>
+          <a:xfrm>
+            <a:off x="0" y="6583680"/>
+            <a:ext cx="12191695" cy="274320"/>
+          </a:xfrm>
+          <a:prstGeom prst="rect">
+            <a:avLst/>
+          </a:prstGeom>
+          <a:solidFill>
+            <a:srgbClr val="F5F5F5"/>
+          </a:solidFill>
+          <a:ln>
+            <a:noFill/>
+          </a:ln>
+        </p:spPr>
+        <p:style>
+          <a:lnRef idx="1">
+            <a:schemeClr val="accent1"/>
+          </a:lnRef>
+          <a:fillRef idx="3">
+            <a:schemeClr val="accent1"/>
+          </a:fillRef>
+          <a:effectRef idx="2">
+            <a:schemeClr val="accent1"/>
+          </a:effectRef>
+          <a:fontRef idx="minor">
+            <a:schemeClr val="lt1"/>
+          </a:fontRef>
+        </p:style>
+        <p:txBody>
+          <a:bodyPr rtlCol="0" anchor="ctr"/>
+          <a:lstStyle/>
+          <a:p>
+            <a:pPr algn="ctr"/>
+          </a:p>
+        </p:txBody>
+      </p:sp>
+      <p:sp>
+        <p:nvSpPr>
+          <p:cNvPr id="5" name="TextBox 4"/>
+          <p:cNvSpPr txBox="1"/>
+          <p:nvPr/>
+        </p:nvSpPr>
+        <p:spPr>
+          <a:xfrm>
+            <a:off x="274320" y="6601968"/>
+            <a:ext cx="4572000" cy="228600"/>
+          </a:xfrm>
+          <a:prstGeom prst="rect">
+            <a:avLst/>
+          </a:prstGeom>
+          <a:noFill/>
+        </p:spPr>
+        <p:txBody>
+          <a:bodyPr wrap="none">
+            <a:spAutoFit/>
+          </a:bodyPr>
+          <a:lstStyle/>
+          <a:p>
+            <a:pPr algn="l">
+              <a:defRPr sz="1000" b="0">
+                <a:solidFill>
+                  <a:srgbClr val="555555"/>
+                </a:solidFill>
+                <a:latin typeface="Arial"/>
+              </a:defRPr>
+            </a:pPr>
+            <a:r>
+              <a:t>Ir y estar</a:t>
+            </a:r>
+          </a:p>
+        </p:txBody>
+      </p:sp>
+      <p:sp>
+        <p:nvSpPr>
+          <p:cNvPr id="6" name="TextBox 5"/>
+          <p:cNvSpPr txBox="1"/>
+          <p:nvPr/>
+        </p:nvSpPr>
+        <p:spPr>
+          <a:xfrm>
+            <a:off x="9144000" y="6601968"/>
+            <a:ext cx="2743200" cy="228600"/>
+          </a:xfrm>
+          <a:prstGeom prst="rect">
+            <a:avLst/>
+          </a:prstGeom>
+          <a:noFill/>
+        </p:spPr>
+        <p:txBody>
+          <a:bodyPr wrap="none">
+            <a:spAutoFit/>
+          </a:bodyPr>
+          <a:lstStyle/>
+          <a:p>
+            <a:pPr algn="r">
+              <a:defRPr sz="1000" b="0">
+                <a:solidFill>
+                  <a:srgbClr val="555555"/>
+                </a:solidFill>
+                <a:latin typeface="Arial"/>
+              </a:defRPr>
+            </a:pPr>
+            <a:r>
+              <a:t>Sequenz 6</a:t>
+            </a:r>
+          </a:p>
+        </p:txBody>
+      </p:sp>
+      <p:sp>
+        <p:nvSpPr>
+          <p:cNvPr id="7" name="TextBox 6"/>
+          <p:cNvSpPr txBox="1"/>
+          <p:nvPr/>
+        </p:nvSpPr>
+        <p:spPr>
+          <a:xfrm>
+            <a:off x="457200" y="640080"/>
             <a:ext cx="11274552" cy="731520"/>
           </a:xfrm>
           <a:prstGeom prst="rect">
@@ -5126,7 +9023,79 @@
               </a:defRPr>
             </a:pPr>
             <a:r>
-              <a:t>📚 Para casa</a:t>
+              <a:t>📝 estar en + Ort</a:t>
+            </a:r>
+          </a:p>
+        </p:txBody>
+      </p:sp>
+      <p:sp>
+        <p:nvSpPr>
+          <p:cNvPr id="8" name="TextBox 7"/>
+          <p:cNvSpPr txBox="1"/>
+          <p:nvPr/>
+        </p:nvSpPr>
+        <p:spPr>
+          <a:xfrm>
+            <a:off x="640080" y="1463040"/>
+            <a:ext cx="5029200" cy="731520"/>
+          </a:xfrm>
+          <a:prstGeom prst="rect">
+            <a:avLst/>
+          </a:prstGeom>
+          <a:noFill/>
+        </p:spPr>
+        <p:txBody>
+          <a:bodyPr wrap="none">
+            <a:spAutoFit/>
+          </a:bodyPr>
+          <a:lstStyle/>
+          <a:p>
+            <a:pPr algn="l">
+              <a:defRPr sz="2800" b="1">
+                <a:solidFill>
+                  <a:srgbClr val="C41E3A"/>
+                </a:solidFill>
+                <a:latin typeface="Arial"/>
+              </a:defRPr>
+            </a:pPr>
+            <a:r>
+              <a:t>Estoy en casa.</a:t>
+            </a:r>
+          </a:p>
+        </p:txBody>
+      </p:sp>
+      <p:sp>
+        <p:nvSpPr>
+          <p:cNvPr id="9" name="TextBox 8"/>
+          <p:cNvSpPr txBox="1"/>
+          <p:nvPr/>
+        </p:nvSpPr>
+        <p:spPr>
+          <a:xfrm>
+            <a:off x="5943600" y="1554480"/>
+            <a:ext cx="5486400" cy="548640"/>
+          </a:xfrm>
+          <a:prstGeom prst="rect">
+            <a:avLst/>
+          </a:prstGeom>
+          <a:noFill/>
+        </p:spPr>
+        <p:txBody>
+          <a:bodyPr wrap="none">
+            <a:spAutoFit/>
+          </a:bodyPr>
+          <a:lstStyle/>
+          <a:p>
+            <a:pPr algn="l">
+              <a:defRPr sz="1800" b="0">
+                <a:solidFill>
+                  <a:srgbClr val="555555"/>
+                </a:solidFill>
+                <a:latin typeface="Arial"/>
+              </a:defRPr>
+            </a:pPr>
+            <a:r>
+              <a:t>Ich bin zu Hause.</a:t>
             </a:r>
           </a:p>
         </p:txBody>
@@ -5139,30 +9108,30 @@
         </p:nvSpPr>
         <p:spPr>
           <a:xfrm>
-            <a:off x="640080" y="2103120"/>
-            <a:ext cx="457200" cy="457200"/>
-          </a:xfrm>
-          <a:prstGeom prst="rect">
-            <a:avLst/>
-          </a:prstGeom>
-          <a:noFill/>
-        </p:spPr>
-        <p:txBody>
-          <a:bodyPr wrap="none">
-            <a:spAutoFit/>
-          </a:bodyPr>
-          <a:lstStyle/>
-          <a:p>
-            <a:pPr algn="l">
-              <a:defRPr sz="2400" b="1">
-                <a:solidFill>
-                  <a:srgbClr val="2A7A4B"/>
-                </a:solidFill>
-                <a:latin typeface="Arial"/>
-              </a:defRPr>
-            </a:pPr>
-            <a:r>
-              <a:t>✓</a:t>
+            <a:off x="640080" y="2560320"/>
+            <a:ext cx="5029200" cy="731520"/>
+          </a:xfrm>
+          <a:prstGeom prst="rect">
+            <a:avLst/>
+          </a:prstGeom>
+          <a:noFill/>
+        </p:spPr>
+        <p:txBody>
+          <a:bodyPr wrap="none">
+            <a:spAutoFit/>
+          </a:bodyPr>
+          <a:lstStyle/>
+          <a:p>
+            <a:pPr algn="l">
+              <a:defRPr sz="2800" b="1">
+                <a:solidFill>
+                  <a:srgbClr val="C41E3A"/>
+                </a:solidFill>
+                <a:latin typeface="Arial"/>
+              </a:defRPr>
+            </a:pPr>
+            <a:r>
+              <a:t>Está en el parque.</a:t>
             </a:r>
           </a:p>
         </p:txBody>
@@ -5175,8 +9144,373 @@
         </p:nvSpPr>
         <p:spPr>
           <a:xfrm>
-            <a:off x="1188720" y="2103120"/>
-            <a:ext cx="10058400" cy="457200"/>
+            <a:off x="5943600" y="2651760"/>
+            <a:ext cx="5486400" cy="548640"/>
+          </a:xfrm>
+          <a:prstGeom prst="rect">
+            <a:avLst/>
+          </a:prstGeom>
+          <a:noFill/>
+        </p:spPr>
+        <p:txBody>
+          <a:bodyPr wrap="none">
+            <a:spAutoFit/>
+          </a:bodyPr>
+          <a:lstStyle/>
+          <a:p>
+            <a:pPr algn="l">
+              <a:defRPr sz="1800" b="0">
+                <a:solidFill>
+                  <a:srgbClr val="555555"/>
+                </a:solidFill>
+                <a:latin typeface="Arial"/>
+              </a:defRPr>
+            </a:pPr>
+            <a:r>
+              <a:t>Er ist im Park.</a:t>
+            </a:r>
+          </a:p>
+        </p:txBody>
+      </p:sp>
+      <p:sp>
+        <p:nvSpPr>
+          <p:cNvPr id="12" name="Rectangle 11"/>
+          <p:cNvSpPr/>
+          <p:nvPr/>
+        </p:nvSpPr>
+        <p:spPr>
+          <a:xfrm>
+            <a:off x="457200" y="5029200"/>
+            <a:ext cx="11274552" cy="1097280"/>
+          </a:xfrm>
+          <a:prstGeom prst="rect">
+            <a:avLst/>
+          </a:prstGeom>
+          <a:solidFill>
+            <a:srgbClr val="FFF8F0"/>
+          </a:solidFill>
+          <a:ln>
+            <a:solidFill>
+              <a:srgbClr val="B35C00"/>
+            </a:solidFill>
+          </a:ln>
+        </p:spPr>
+        <p:style>
+          <a:lnRef idx="1">
+            <a:schemeClr val="accent1"/>
+          </a:lnRef>
+          <a:fillRef idx="3">
+            <a:schemeClr val="accent1"/>
+          </a:fillRef>
+          <a:effectRef idx="2">
+            <a:schemeClr val="accent1"/>
+          </a:effectRef>
+          <a:fontRef idx="minor">
+            <a:schemeClr val="lt1"/>
+          </a:fontRef>
+        </p:style>
+        <p:txBody>
+          <a:bodyPr rtlCol="0" anchor="ctr"/>
+          <a:lstStyle/>
+          <a:p>
+            <a:pPr algn="ctr"/>
+          </a:p>
+        </p:txBody>
+      </p:sp>
+      <p:sp>
+        <p:nvSpPr>
+          <p:cNvPr id="13" name="TextBox 12"/>
+          <p:cNvSpPr txBox="1"/>
+          <p:nvPr/>
+        </p:nvSpPr>
+        <p:spPr>
+          <a:xfrm>
+            <a:off x="640080" y="5212080"/>
+            <a:ext cx="10972800" cy="731520"/>
+          </a:xfrm>
+          <a:prstGeom prst="rect">
+            <a:avLst/>
+          </a:prstGeom>
+          <a:noFill/>
+        </p:spPr>
+        <p:txBody>
+          <a:bodyPr wrap="none">
+            <a:spAutoFit/>
+          </a:bodyPr>
+          <a:lstStyle/>
+          <a:p>
+            <a:pPr algn="l">
+              <a:defRPr sz="1600" b="0">
+                <a:solidFill>
+                  <a:srgbClr val="222222"/>
+                </a:solidFill>
+                <a:latin typeface="Arial"/>
+              </a:defRPr>
+            </a:pPr>
+            <a:r>
+              <a:t>💡 estar = Ort, ser = Eigenschaft</a:t>
+            </a:r>
+          </a:p>
+        </p:txBody>
+      </p:sp>
+    </p:spTree>
+  </p:cSld>
+  <p:clrMapOvr>
+    <a:masterClrMapping/>
+  </p:clrMapOvr>
+</p:sld>
+</file>
+
+<file path=ppt/slides/slide9.xml><?xml version="1.0" encoding="utf-8"?>
+<p:sld xmlns:a="http://schemas.openxmlformats.org/drawingml/2006/main" xmlns:p="http://schemas.openxmlformats.org/presentationml/2006/main" xmlns:r="http://schemas.openxmlformats.org/officeDocument/2006/relationships">
+  <p:cSld>
+    <p:spTree>
+      <p:nvGrpSpPr>
+        <p:cNvPr id="1" name=""/>
+        <p:cNvGrpSpPr/>
+        <p:nvPr/>
+      </p:nvGrpSpPr>
+      <p:grpSpPr/>
+      <p:sp>
+        <p:nvSpPr>
+          <p:cNvPr id="2" name="Rectangle 1"/>
+          <p:cNvSpPr/>
+          <p:nvPr/>
+        </p:nvSpPr>
+        <p:spPr>
+          <a:xfrm>
+            <a:off x="0" y="0"/>
+            <a:ext cx="12191695" cy="457200"/>
+          </a:xfrm>
+          <a:prstGeom prst="rect">
+            <a:avLst/>
+          </a:prstGeom>
+          <a:solidFill>
+            <a:srgbClr val="C41E3A"/>
+          </a:solidFill>
+          <a:ln>
+            <a:noFill/>
+          </a:ln>
+        </p:spPr>
+        <p:style>
+          <a:lnRef idx="1">
+            <a:schemeClr val="accent1"/>
+          </a:lnRef>
+          <a:fillRef idx="3">
+            <a:schemeClr val="accent1"/>
+          </a:fillRef>
+          <a:effectRef idx="2">
+            <a:schemeClr val="accent1"/>
+          </a:effectRef>
+          <a:fontRef idx="minor">
+            <a:schemeClr val="lt1"/>
+          </a:fontRef>
+        </p:style>
+        <p:txBody>
+          <a:bodyPr rtlCol="0" anchor="ctr"/>
+          <a:lstStyle/>
+          <a:p>
+            <a:pPr algn="ctr"/>
+          </a:p>
+        </p:txBody>
+      </p:sp>
+      <p:sp>
+        <p:nvSpPr>
+          <p:cNvPr id="3" name="TextBox 2"/>
+          <p:cNvSpPr txBox="1"/>
+          <p:nvPr/>
+        </p:nvSpPr>
+        <p:spPr>
+          <a:xfrm>
+            <a:off x="274320" y="91440"/>
+            <a:ext cx="3657600" cy="274320"/>
+          </a:xfrm>
+          <a:prstGeom prst="rect">
+            <a:avLst/>
+          </a:prstGeom>
+          <a:noFill/>
+        </p:spPr>
+        <p:txBody>
+          <a:bodyPr wrap="none">
+            <a:spAutoFit/>
+          </a:bodyPr>
+          <a:lstStyle/>
+          <a:p>
+            <a:pPr algn="l">
+              <a:defRPr sz="1400" b="1">
+                <a:solidFill>
+                  <a:srgbClr val="FFFFFF"/>
+                </a:solidFill>
+                <a:latin typeface="Arial"/>
+              </a:defRPr>
+            </a:pPr>
+            <a:r>
+              <a:t>Spanisch Klasse 7 · LP-06b</a:t>
+            </a:r>
+          </a:p>
+        </p:txBody>
+      </p:sp>
+      <p:sp>
+        <p:nvSpPr>
+          <p:cNvPr id="4" name="Rectangle 3"/>
+          <p:cNvSpPr/>
+          <p:nvPr/>
+        </p:nvSpPr>
+        <p:spPr>
+          <a:xfrm>
+            <a:off x="0" y="6583680"/>
+            <a:ext cx="12191695" cy="274320"/>
+          </a:xfrm>
+          <a:prstGeom prst="rect">
+            <a:avLst/>
+          </a:prstGeom>
+          <a:solidFill>
+            <a:srgbClr val="F5F5F5"/>
+          </a:solidFill>
+          <a:ln>
+            <a:noFill/>
+          </a:ln>
+        </p:spPr>
+        <p:style>
+          <a:lnRef idx="1">
+            <a:schemeClr val="accent1"/>
+          </a:lnRef>
+          <a:fillRef idx="3">
+            <a:schemeClr val="accent1"/>
+          </a:fillRef>
+          <a:effectRef idx="2">
+            <a:schemeClr val="accent1"/>
+          </a:effectRef>
+          <a:fontRef idx="minor">
+            <a:schemeClr val="lt1"/>
+          </a:fontRef>
+        </p:style>
+        <p:txBody>
+          <a:bodyPr rtlCol="0" anchor="ctr"/>
+          <a:lstStyle/>
+          <a:p>
+            <a:pPr algn="ctr"/>
+          </a:p>
+        </p:txBody>
+      </p:sp>
+      <p:sp>
+        <p:nvSpPr>
+          <p:cNvPr id="5" name="TextBox 4"/>
+          <p:cNvSpPr txBox="1"/>
+          <p:nvPr/>
+        </p:nvSpPr>
+        <p:spPr>
+          <a:xfrm>
+            <a:off x="274320" y="6601968"/>
+            <a:ext cx="4572000" cy="228600"/>
+          </a:xfrm>
+          <a:prstGeom prst="rect">
+            <a:avLst/>
+          </a:prstGeom>
+          <a:noFill/>
+        </p:spPr>
+        <p:txBody>
+          <a:bodyPr wrap="none">
+            <a:spAutoFit/>
+          </a:bodyPr>
+          <a:lstStyle/>
+          <a:p>
+            <a:pPr algn="l">
+              <a:defRPr sz="1000" b="0">
+                <a:solidFill>
+                  <a:srgbClr val="555555"/>
+                </a:solidFill>
+                <a:latin typeface="Arial"/>
+              </a:defRPr>
+            </a:pPr>
+            <a:r>
+              <a:t>Ir y estar</a:t>
+            </a:r>
+          </a:p>
+        </p:txBody>
+      </p:sp>
+      <p:sp>
+        <p:nvSpPr>
+          <p:cNvPr id="6" name="TextBox 5"/>
+          <p:cNvSpPr txBox="1"/>
+          <p:nvPr/>
+        </p:nvSpPr>
+        <p:spPr>
+          <a:xfrm>
+            <a:off x="9144000" y="6601968"/>
+            <a:ext cx="2743200" cy="228600"/>
+          </a:xfrm>
+          <a:prstGeom prst="rect">
+            <a:avLst/>
+          </a:prstGeom>
+          <a:noFill/>
+        </p:spPr>
+        <p:txBody>
+          <a:bodyPr wrap="none">
+            <a:spAutoFit/>
+          </a:bodyPr>
+          <a:lstStyle/>
+          <a:p>
+            <a:pPr algn="r">
+              <a:defRPr sz="1000" b="0">
+                <a:solidFill>
+                  <a:srgbClr val="555555"/>
+                </a:solidFill>
+                <a:latin typeface="Arial"/>
+              </a:defRPr>
+            </a:pPr>
+            <a:r>
+              <a:t>Sequenz 6</a:t>
+            </a:r>
+          </a:p>
+        </p:txBody>
+      </p:sp>
+      <p:sp>
+        <p:nvSpPr>
+          <p:cNvPr id="7" name="TextBox 6"/>
+          <p:cNvSpPr txBox="1"/>
+          <p:nvPr/>
+        </p:nvSpPr>
+        <p:spPr>
+          <a:xfrm>
+            <a:off x="457200" y="640080"/>
+            <a:ext cx="11274552" cy="731520"/>
+          </a:xfrm>
+          <a:prstGeom prst="rect">
+            <a:avLst/>
+          </a:prstGeom>
+          <a:noFill/>
+        </p:spPr>
+        <p:txBody>
+          <a:bodyPr wrap="none">
+            <a:spAutoFit/>
+          </a:bodyPr>
+          <a:lstStyle/>
+          <a:p>
+            <a:pPr algn="l">
+              <a:defRPr sz="3200" b="1">
+                <a:solidFill>
+                  <a:srgbClr val="C41E3A"/>
+                </a:solidFill>
+                <a:latin typeface="Arial"/>
+              </a:defRPr>
+            </a:pPr>
+            <a:r>
+              <a:t>Zusammenfassung ir vs. estar</a:t>
+            </a:r>
+          </a:p>
+        </p:txBody>
+      </p:sp>
+      <p:sp>
+        <p:nvSpPr>
+          <p:cNvPr id="8" name="TextBox 7"/>
+          <p:cNvSpPr txBox="1"/>
+          <p:nvPr/>
+        </p:nvSpPr>
+        <p:spPr>
+          <a:xfrm>
+            <a:off x="640080" y="1463040"/>
+            <a:ext cx="10972800" cy="548640"/>
           </a:xfrm>
           <a:prstGeom prst="rect">
             <a:avLst/>
@@ -5198,43 +9532,79 @@
               </a:defRPr>
             </a:pPr>
             <a:r>
-              <a:t>ir und estar konjugieren</a:t>
-            </a:r>
-          </a:p>
-        </p:txBody>
-      </p:sp>
-      <p:sp>
-        <p:nvSpPr>
-          <p:cNvPr id="12" name="TextBox 11"/>
-          <p:cNvSpPr txBox="1"/>
-          <p:nvPr/>
-        </p:nvSpPr>
-        <p:spPr>
-          <a:xfrm>
-            <a:off x="457200" y="5760720"/>
-            <a:ext cx="11274552" cy="548640"/>
-          </a:xfrm>
-          <a:prstGeom prst="rect">
-            <a:avLst/>
-          </a:prstGeom>
-          <a:noFill/>
-        </p:spPr>
-        <p:txBody>
-          <a:bodyPr wrap="none">
-            <a:spAutoFit/>
-          </a:bodyPr>
-          <a:lstStyle/>
-          <a:p>
-            <a:pPr algn="ctr">
-              <a:defRPr sz="3200" b="1">
-                <a:solidFill>
-                  <a:srgbClr val="C41E3A"/>
-                </a:solidFill>
-                <a:latin typeface="Arial"/>
-              </a:defRPr>
-            </a:pPr>
-            <a:r>
-              <a:t>¡Hasta luego!</a:t>
+              <a:t>ir a = wohin? (Bewegung)</a:t>
+            </a:r>
+          </a:p>
+        </p:txBody>
+      </p:sp>
+      <p:sp>
+        <p:nvSpPr>
+          <p:cNvPr id="9" name="TextBox 8"/>
+          <p:cNvSpPr txBox="1"/>
+          <p:nvPr/>
+        </p:nvSpPr>
+        <p:spPr>
+          <a:xfrm>
+            <a:off x="640080" y="2194560"/>
+            <a:ext cx="10972800" cy="548640"/>
+          </a:xfrm>
+          <a:prstGeom prst="rect">
+            <a:avLst/>
+          </a:prstGeom>
+          <a:noFill/>
+        </p:spPr>
+        <p:txBody>
+          <a:bodyPr wrap="none">
+            <a:spAutoFit/>
+          </a:bodyPr>
+          <a:lstStyle/>
+          <a:p>
+            <a:pPr algn="l">
+              <a:defRPr sz="2000" b="0">
+                <a:solidFill>
+                  <a:srgbClr val="222222"/>
+                </a:solidFill>
+                <a:latin typeface="Arial"/>
+              </a:defRPr>
+            </a:pPr>
+            <a:r>
+              <a:t>estar en = wo? (Ort)</a:t>
+            </a:r>
+          </a:p>
+        </p:txBody>
+      </p:sp>
+      <p:sp>
+        <p:nvSpPr>
+          <p:cNvPr id="10" name="TextBox 9"/>
+          <p:cNvSpPr txBox="1"/>
+          <p:nvPr/>
+        </p:nvSpPr>
+        <p:spPr>
+          <a:xfrm>
+            <a:off x="640080" y="2926080"/>
+            <a:ext cx="10972800" cy="548640"/>
+          </a:xfrm>
+          <a:prstGeom prst="rect">
+            <a:avLst/>
+          </a:prstGeom>
+          <a:noFill/>
+        </p:spPr>
+        <p:txBody>
+          <a:bodyPr wrap="none">
+            <a:spAutoFit/>
+          </a:bodyPr>
+          <a:lstStyle/>
+          <a:p>
+            <a:pPr algn="l">
+              <a:defRPr sz="2000" b="0">
+                <a:solidFill>
+                  <a:srgbClr val="222222"/>
+                </a:solidFill>
+                <a:latin typeface="Arial"/>
+              </a:defRPr>
+            </a:pPr>
+            <a:r>
+              <a:t>Voy al cine. Estoy en el cine.</a:t>
             </a:r>
           </a:p>
         </p:txBody>
